--- a/Theory.pptx
+++ b/Theory.pptx
@@ -5,7 +5,7 @@
     <p:sldMasterId id="2147483648" r:id="rId1"/>
   </p:sldMasterIdLst>
   <p:notesMasterIdLst>
-    <p:notesMasterId r:id="rId19"/>
+    <p:notesMasterId r:id="rId30"/>
   </p:notesMasterIdLst>
   <p:sldIdLst>
     <p:sldId id="256" r:id="rId2"/>
@@ -25,6 +25,17 @@
     <p:sldId id="271" r:id="rId16"/>
     <p:sldId id="272" r:id="rId17"/>
     <p:sldId id="273" r:id="rId18"/>
+    <p:sldId id="274" r:id="rId19"/>
+    <p:sldId id="275" r:id="rId20"/>
+    <p:sldId id="278" r:id="rId21"/>
+    <p:sldId id="276" r:id="rId22"/>
+    <p:sldId id="277" r:id="rId23"/>
+    <p:sldId id="279" r:id="rId24"/>
+    <p:sldId id="280" r:id="rId25"/>
+    <p:sldId id="281" r:id="rId26"/>
+    <p:sldId id="282" r:id="rId27"/>
+    <p:sldId id="283" r:id="rId28"/>
+    <p:sldId id="284" r:id="rId29"/>
   </p:sldIdLst>
   <p:sldSz cx="12192000" cy="6858000"/>
   <p:notesSz cx="6858000" cy="9144000"/>
@@ -213,7 +224,7 @@
           <a:p>
             <a:fld id="{14F497BF-0581-4BDA-B8A2-FD96A637874A}" type="datetimeFigureOut">
               <a:rPr lang="en-US" smtClean="0"/>
-              <a:t>3/5/2025</a:t>
+              <a:t>3/10/2025</a:t>
             </a:fld>
             <a:endParaRPr lang="en-US"/>
           </a:p>
@@ -564,6 +575,90 @@
 </p:notes>
 </file>
 
+<file path=ppt/notesSlides/notesSlide2.xml><?xml version="1.0" encoding="utf-8"?>
+<p:notes xmlns:a="http://schemas.openxmlformats.org/drawingml/2006/main" xmlns:r="http://schemas.openxmlformats.org/officeDocument/2006/relationships" xmlns:p="http://schemas.openxmlformats.org/presentationml/2006/main">
+  <p:cSld>
+    <p:spTree>
+      <p:nvGrpSpPr>
+        <p:cNvPr id="1" name=""/>
+        <p:cNvGrpSpPr/>
+        <p:nvPr/>
+      </p:nvGrpSpPr>
+      <p:grpSpPr>
+        <a:xfrm>
+          <a:off x="0" y="0"/>
+          <a:ext cx="0" cy="0"/>
+          <a:chOff x="0" y="0"/>
+          <a:chExt cx="0" cy="0"/>
+        </a:xfrm>
+      </p:grpSpPr>
+      <p:sp>
+        <p:nvSpPr>
+          <p:cNvPr id="2" name="Slide Image Placeholder 1"/>
+          <p:cNvSpPr>
+            <a:spLocks noGrp="1" noRot="1" noChangeAspect="1"/>
+          </p:cNvSpPr>
+          <p:nvPr>
+            <p:ph type="sldImg"/>
+          </p:nvPr>
+        </p:nvSpPr>
+        <p:spPr/>
+      </p:sp>
+      <p:sp>
+        <p:nvSpPr>
+          <p:cNvPr id="3" name="Notes Placeholder 2"/>
+          <p:cNvSpPr>
+            <a:spLocks noGrp="1"/>
+          </p:cNvSpPr>
+          <p:nvPr>
+            <p:ph type="body" idx="1"/>
+          </p:nvPr>
+        </p:nvSpPr>
+        <p:spPr/>
+        <p:txBody>
+          <a:bodyPr/>
+          <a:lstStyle/>
+          <a:p>
+            <a:endParaRPr lang="en-US" dirty="0"/>
+          </a:p>
+        </p:txBody>
+      </p:sp>
+      <p:sp>
+        <p:nvSpPr>
+          <p:cNvPr id="4" name="Slide Number Placeholder 3"/>
+          <p:cNvSpPr>
+            <a:spLocks noGrp="1"/>
+          </p:cNvSpPr>
+          <p:nvPr>
+            <p:ph type="sldNum" sz="quarter" idx="5"/>
+          </p:nvPr>
+        </p:nvSpPr>
+        <p:spPr/>
+        <p:txBody>
+          <a:bodyPr/>
+          <a:lstStyle/>
+          <a:p>
+            <a:fld id="{8F8BFAE7-7384-4625-AC9A-B51438491BD3}" type="slidenum">
+              <a:rPr lang="en-US" smtClean="0"/>
+              <a:t>24</a:t>
+            </a:fld>
+            <a:endParaRPr lang="en-US"/>
+          </a:p>
+        </p:txBody>
+      </p:sp>
+    </p:spTree>
+    <p:extLst>
+      <p:ext uri="{BB962C8B-B14F-4D97-AF65-F5344CB8AC3E}">
+        <p14:creationId xmlns:p14="http://schemas.microsoft.com/office/powerpoint/2010/main" val="492072517"/>
+      </p:ext>
+    </p:extLst>
+  </p:cSld>
+  <p:clrMapOvr>
+    <a:masterClrMapping/>
+  </p:clrMapOvr>
+</p:notes>
+</file>
+
 <file path=ppt/slideLayouts/slideLayout1.xml><?xml version="1.0" encoding="utf-8"?>
 <p:sldLayout xmlns:a="http://schemas.openxmlformats.org/drawingml/2006/main" xmlns:r="http://schemas.openxmlformats.org/officeDocument/2006/relationships" xmlns:p="http://schemas.openxmlformats.org/presentationml/2006/main" type="title" preserve="1">
   <p:cSld name="Title Slide">
@@ -711,7 +806,7 @@
           <a:p>
             <a:fld id="{1169EDD0-EB47-409A-86C8-B8651F7090EE}" type="datetimeFigureOut">
               <a:rPr lang="en-US" smtClean="0"/>
-              <a:t>3/5/2025</a:t>
+              <a:t>3/10/2025</a:t>
             </a:fld>
             <a:endParaRPr lang="en-US"/>
           </a:p>
@@ -909,7 +1004,7 @@
           <a:p>
             <a:fld id="{1169EDD0-EB47-409A-86C8-B8651F7090EE}" type="datetimeFigureOut">
               <a:rPr lang="en-US" smtClean="0"/>
-              <a:t>3/5/2025</a:t>
+              <a:t>3/10/2025</a:t>
             </a:fld>
             <a:endParaRPr lang="en-US"/>
           </a:p>
@@ -1117,7 +1212,7 @@
           <a:p>
             <a:fld id="{1169EDD0-EB47-409A-86C8-B8651F7090EE}" type="datetimeFigureOut">
               <a:rPr lang="en-US" smtClean="0"/>
-              <a:t>3/5/2025</a:t>
+              <a:t>3/10/2025</a:t>
             </a:fld>
             <a:endParaRPr lang="en-US"/>
           </a:p>
@@ -1315,7 +1410,7 @@
           <a:p>
             <a:fld id="{1169EDD0-EB47-409A-86C8-B8651F7090EE}" type="datetimeFigureOut">
               <a:rPr lang="en-US" smtClean="0"/>
-              <a:t>3/5/2025</a:t>
+              <a:t>3/10/2025</a:t>
             </a:fld>
             <a:endParaRPr lang="en-US"/>
           </a:p>
@@ -1590,7 +1685,7 @@
           <a:p>
             <a:fld id="{1169EDD0-EB47-409A-86C8-B8651F7090EE}" type="datetimeFigureOut">
               <a:rPr lang="en-US" smtClean="0"/>
-              <a:t>3/5/2025</a:t>
+              <a:t>3/10/2025</a:t>
             </a:fld>
             <a:endParaRPr lang="en-US"/>
           </a:p>
@@ -1855,7 +1950,7 @@
           <a:p>
             <a:fld id="{1169EDD0-EB47-409A-86C8-B8651F7090EE}" type="datetimeFigureOut">
               <a:rPr lang="en-US" smtClean="0"/>
-              <a:t>3/5/2025</a:t>
+              <a:t>3/10/2025</a:t>
             </a:fld>
             <a:endParaRPr lang="en-US"/>
           </a:p>
@@ -2267,7 +2362,7 @@
           <a:p>
             <a:fld id="{1169EDD0-EB47-409A-86C8-B8651F7090EE}" type="datetimeFigureOut">
               <a:rPr lang="en-US" smtClean="0"/>
-              <a:t>3/5/2025</a:t>
+              <a:t>3/10/2025</a:t>
             </a:fld>
             <a:endParaRPr lang="en-US"/>
           </a:p>
@@ -2408,7 +2503,7 @@
           <a:p>
             <a:fld id="{1169EDD0-EB47-409A-86C8-B8651F7090EE}" type="datetimeFigureOut">
               <a:rPr lang="en-US" smtClean="0"/>
-              <a:t>3/5/2025</a:t>
+              <a:t>3/10/2025</a:t>
             </a:fld>
             <a:endParaRPr lang="en-US"/>
           </a:p>
@@ -2521,7 +2616,7 @@
           <a:p>
             <a:fld id="{1169EDD0-EB47-409A-86C8-B8651F7090EE}" type="datetimeFigureOut">
               <a:rPr lang="en-US" smtClean="0"/>
-              <a:t>3/5/2025</a:t>
+              <a:t>3/10/2025</a:t>
             </a:fld>
             <a:endParaRPr lang="en-US"/>
           </a:p>
@@ -2832,7 +2927,7 @@
           <a:p>
             <a:fld id="{1169EDD0-EB47-409A-86C8-B8651F7090EE}" type="datetimeFigureOut">
               <a:rPr lang="en-US" smtClean="0"/>
-              <a:t>3/5/2025</a:t>
+              <a:t>3/10/2025</a:t>
             </a:fld>
             <a:endParaRPr lang="en-US"/>
           </a:p>
@@ -3120,7 +3215,7 @@
           <a:p>
             <a:fld id="{1169EDD0-EB47-409A-86C8-B8651F7090EE}" type="datetimeFigureOut">
               <a:rPr lang="en-US" smtClean="0"/>
-              <a:t>3/5/2025</a:t>
+              <a:t>3/10/2025</a:t>
             </a:fld>
             <a:endParaRPr lang="en-US"/>
           </a:p>
@@ -3361,7 +3456,7 @@
           <a:p>
             <a:fld id="{1169EDD0-EB47-409A-86C8-B8651F7090EE}" type="datetimeFigureOut">
               <a:rPr lang="en-US" smtClean="0"/>
-              <a:t>3/5/2025</a:t>
+              <a:t>3/10/2025</a:t>
             </a:fld>
             <a:endParaRPr lang="en-US"/>
           </a:p>
@@ -5290,12 +5385,12 @@
               <a:buNone/>
             </a:pPr>
             <a:r>
-              <a:rPr lang="en-US">
+              <a:rPr lang="en-US" dirty="0">
                 <a:hlinkClick r:id="rId2"/>
               </a:rPr>
               <a:t>TKJ Electronics » A practical approach to Kalman filter and how to implement it</a:t>
             </a:r>
-            <a:endParaRPr lang="en-US"/>
+            <a:endParaRPr lang="en-US" dirty="0"/>
           </a:p>
         </p:txBody>
       </p:sp>
@@ -5303,6 +5398,309 @@
     <p:extLst>
       <p:ext uri="{BB962C8B-B14F-4D97-AF65-F5344CB8AC3E}">
         <p14:creationId xmlns:p14="http://schemas.microsoft.com/office/powerpoint/2010/main" val="4258900484"/>
+      </p:ext>
+    </p:extLst>
+  </p:cSld>
+  <p:clrMapOvr>
+    <a:masterClrMapping/>
+  </p:clrMapOvr>
+</p:sld>
+</file>
+
+<file path=ppt/slides/slide18.xml><?xml version="1.0" encoding="utf-8"?>
+<p:sld xmlns:a="http://schemas.openxmlformats.org/drawingml/2006/main" xmlns:r="http://schemas.openxmlformats.org/officeDocument/2006/relationships" xmlns:p="http://schemas.openxmlformats.org/presentationml/2006/main">
+  <p:cSld>
+    <p:spTree>
+      <p:nvGrpSpPr>
+        <p:cNvPr id="1" name=""/>
+        <p:cNvGrpSpPr/>
+        <p:nvPr/>
+      </p:nvGrpSpPr>
+      <p:grpSpPr>
+        <a:xfrm>
+          <a:off x="0" y="0"/>
+          <a:ext cx="0" cy="0"/>
+          <a:chOff x="0" y="0"/>
+          <a:chExt cx="0" cy="0"/>
+        </a:xfrm>
+      </p:grpSpPr>
+      <p:sp>
+        <p:nvSpPr>
+          <p:cNvPr id="2" name="Title 1">
+            <a:extLst>
+              <a:ext uri="{FF2B5EF4-FFF2-40B4-BE49-F238E27FC236}">
+                <a16:creationId xmlns:a16="http://schemas.microsoft.com/office/drawing/2014/main" id="{2D36F483-89B8-5320-FD65-A3286C25A7A0}"/>
+              </a:ext>
+            </a:extLst>
+          </p:cNvPr>
+          <p:cNvSpPr>
+            <a:spLocks noGrp="1"/>
+          </p:cNvSpPr>
+          <p:nvPr>
+            <p:ph type="title"/>
+          </p:nvPr>
+        </p:nvSpPr>
+        <p:spPr/>
+        <p:txBody>
+          <a:bodyPr/>
+          <a:lstStyle/>
+          <a:p>
+            <a:r>
+              <a:rPr lang="en-US" dirty="0"/>
+              <a:t>MS5611 CONFIGURATION</a:t>
+            </a:r>
+          </a:p>
+        </p:txBody>
+      </p:sp>
+      <p:sp>
+        <p:nvSpPr>
+          <p:cNvPr id="3" name="Content Placeholder 2">
+            <a:extLst>
+              <a:ext uri="{FF2B5EF4-FFF2-40B4-BE49-F238E27FC236}">
+                <a16:creationId xmlns:a16="http://schemas.microsoft.com/office/drawing/2014/main" id="{5A6027EE-96BC-D85E-C8D8-6C600E42DC51}"/>
+              </a:ext>
+            </a:extLst>
+          </p:cNvPr>
+          <p:cNvSpPr>
+            <a:spLocks noGrp="1"/>
+          </p:cNvSpPr>
+          <p:nvPr>
+            <p:ph idx="1"/>
+          </p:nvPr>
+        </p:nvSpPr>
+        <p:spPr/>
+        <p:txBody>
+          <a:bodyPr/>
+          <a:lstStyle/>
+          <a:p>
+            <a:pPr marL="0" indent="0">
+              <a:buNone/>
+            </a:pPr>
+            <a:r>
+              <a:rPr lang="en-US" b="1" dirty="0"/>
+              <a:t>I2C mode</a:t>
+            </a:r>
+          </a:p>
+          <a:p>
+            <a:pPr marL="0" indent="0">
+              <a:buNone/>
+            </a:pPr>
+            <a:r>
+              <a:rPr lang="en-US" dirty="0"/>
+              <a:t>The MS5611-01BA has only five basic commands: </a:t>
+            </a:r>
+          </a:p>
+          <a:p>
+            <a:pPr marL="514350" indent="-514350">
+              <a:buAutoNum type="arabicPeriod"/>
+            </a:pPr>
+            <a:r>
+              <a:rPr lang="en-US" dirty="0"/>
+              <a:t>Reset </a:t>
+            </a:r>
+          </a:p>
+          <a:p>
+            <a:pPr marL="514350" indent="-514350">
+              <a:buAutoNum type="arabicPeriod"/>
+            </a:pPr>
+            <a:r>
+              <a:rPr lang="en-US" dirty="0"/>
+              <a:t>Read PROM (128 bit of calibration words) </a:t>
+            </a:r>
+          </a:p>
+          <a:p>
+            <a:pPr marL="514350" indent="-514350">
+              <a:buAutoNum type="arabicPeriod"/>
+            </a:pPr>
+            <a:r>
+              <a:rPr lang="en-US" dirty="0"/>
+              <a:t>D1 conversion </a:t>
+            </a:r>
+          </a:p>
+          <a:p>
+            <a:pPr marL="514350" indent="-514350">
+              <a:buAutoNum type="arabicPeriod"/>
+            </a:pPr>
+            <a:r>
+              <a:rPr lang="en-US" dirty="0"/>
+              <a:t>D2 conversion </a:t>
+            </a:r>
+          </a:p>
+          <a:p>
+            <a:pPr marL="514350" indent="-514350">
+              <a:buAutoNum type="arabicPeriod"/>
+            </a:pPr>
+            <a:r>
+              <a:rPr lang="en-US" dirty="0"/>
+              <a:t>Read ADC result (24 bit pressure / temperature) </a:t>
+            </a:r>
+          </a:p>
+        </p:txBody>
+      </p:sp>
+    </p:spTree>
+    <p:extLst>
+      <p:ext uri="{BB962C8B-B14F-4D97-AF65-F5344CB8AC3E}">
+        <p14:creationId xmlns:p14="http://schemas.microsoft.com/office/powerpoint/2010/main" val="2197100558"/>
+      </p:ext>
+    </p:extLst>
+  </p:cSld>
+  <p:clrMapOvr>
+    <a:masterClrMapping/>
+  </p:clrMapOvr>
+</p:sld>
+</file>
+
+<file path=ppt/slides/slide19.xml><?xml version="1.0" encoding="utf-8"?>
+<p:sld xmlns:a="http://schemas.openxmlformats.org/drawingml/2006/main" xmlns:r="http://schemas.openxmlformats.org/officeDocument/2006/relationships" xmlns:p="http://schemas.openxmlformats.org/presentationml/2006/main">
+  <p:cSld>
+    <p:spTree>
+      <p:nvGrpSpPr>
+        <p:cNvPr id="1" name=""/>
+        <p:cNvGrpSpPr/>
+        <p:nvPr/>
+      </p:nvGrpSpPr>
+      <p:grpSpPr>
+        <a:xfrm>
+          <a:off x="0" y="0"/>
+          <a:ext cx="0" cy="0"/>
+          <a:chOff x="0" y="0"/>
+          <a:chExt cx="0" cy="0"/>
+        </a:xfrm>
+      </p:grpSpPr>
+      <p:sp>
+        <p:nvSpPr>
+          <p:cNvPr id="2" name="Title 1">
+            <a:extLst>
+              <a:ext uri="{FF2B5EF4-FFF2-40B4-BE49-F238E27FC236}">
+                <a16:creationId xmlns:a16="http://schemas.microsoft.com/office/drawing/2014/main" id="{ED23CD2D-2A00-7EDA-50EC-632B810276CF}"/>
+              </a:ext>
+            </a:extLst>
+          </p:cNvPr>
+          <p:cNvSpPr>
+            <a:spLocks noGrp="1"/>
+          </p:cNvSpPr>
+          <p:nvPr>
+            <p:ph type="title"/>
+          </p:nvPr>
+        </p:nvSpPr>
+        <p:spPr/>
+        <p:txBody>
+          <a:bodyPr/>
+          <a:lstStyle/>
+          <a:p>
+            <a:r>
+              <a:rPr lang="en-US" dirty="0"/>
+              <a:t>MS5611 CONFIGURATION</a:t>
+            </a:r>
+          </a:p>
+        </p:txBody>
+      </p:sp>
+      <p:sp>
+        <p:nvSpPr>
+          <p:cNvPr id="3" name="Content Placeholder 2">
+            <a:extLst>
+              <a:ext uri="{FF2B5EF4-FFF2-40B4-BE49-F238E27FC236}">
+                <a16:creationId xmlns:a16="http://schemas.microsoft.com/office/drawing/2014/main" id="{C1C10928-66A9-B1C0-1BDA-5FD4F1EBDECB}"/>
+              </a:ext>
+            </a:extLst>
+          </p:cNvPr>
+          <p:cNvSpPr>
+            <a:spLocks noGrp="1"/>
+          </p:cNvSpPr>
+          <p:nvPr>
+            <p:ph idx="1"/>
+          </p:nvPr>
+        </p:nvSpPr>
+        <p:spPr/>
+        <p:txBody>
+          <a:bodyPr/>
+          <a:lstStyle/>
+          <a:p>
+            <a:pPr marL="0" indent="0">
+              <a:buNone/>
+            </a:pPr>
+            <a:r>
+              <a:rPr lang="en-US" b="1" dirty="0"/>
+              <a:t>Reset command(0x1E) </a:t>
+            </a:r>
+          </a:p>
+        </p:txBody>
+      </p:sp>
+      <p:pic>
+        <p:nvPicPr>
+          <p:cNvPr id="5" name="Picture 4">
+            <a:extLst>
+              <a:ext uri="{FF2B5EF4-FFF2-40B4-BE49-F238E27FC236}">
+                <a16:creationId xmlns:a16="http://schemas.microsoft.com/office/drawing/2014/main" id="{324BD366-3D1A-CF74-FED3-F64529066B82}"/>
+              </a:ext>
+            </a:extLst>
+          </p:cNvPr>
+          <p:cNvPicPr>
+            <a:picLocks noChangeAspect="1"/>
+          </p:cNvPicPr>
+          <p:nvPr/>
+        </p:nvPicPr>
+        <p:blipFill>
+          <a:blip r:embed="rId2">
+            <a:extLst>
+              <a:ext uri="{28A0092B-C50C-407E-A947-70E740481C1C}">
+                <a14:useLocalDpi xmlns:a14="http://schemas.microsoft.com/office/drawing/2010/main" val="0"/>
+              </a:ext>
+            </a:extLst>
+          </a:blip>
+          <a:stretch>
+            <a:fillRect/>
+          </a:stretch>
+        </p:blipFill>
+        <p:spPr>
+          <a:xfrm>
+            <a:off x="952266" y="2284493"/>
+            <a:ext cx="8929671" cy="2289014"/>
+          </a:xfrm>
+          <a:prstGeom prst="rect">
+            <a:avLst/>
+          </a:prstGeom>
+        </p:spPr>
+      </p:pic>
+      <p:sp>
+        <p:nvSpPr>
+          <p:cNvPr id="6" name="TextBox 5">
+            <a:extLst>
+              <a:ext uri="{FF2B5EF4-FFF2-40B4-BE49-F238E27FC236}">
+                <a16:creationId xmlns:a16="http://schemas.microsoft.com/office/drawing/2014/main" id="{43446CEF-431C-1DD5-D083-29460C05F8A1}"/>
+              </a:ext>
+            </a:extLst>
+          </p:cNvPr>
+          <p:cNvSpPr txBox="1"/>
+          <p:nvPr/>
+        </p:nvSpPr>
+        <p:spPr>
+          <a:xfrm>
+            <a:off x="4529667" y="1915161"/>
+            <a:ext cx="2239203" cy="369332"/>
+          </a:xfrm>
+          <a:prstGeom prst="rect">
+            <a:avLst/>
+          </a:prstGeom>
+          <a:noFill/>
+        </p:spPr>
+        <p:txBody>
+          <a:bodyPr wrap="none" rtlCol="0">
+            <a:spAutoFit/>
+          </a:bodyPr>
+          <a:lstStyle/>
+          <a:p>
+            <a:r>
+              <a:rPr lang="en-US" b="1" dirty="0"/>
+              <a:t>Device Address(0x77)</a:t>
+            </a:r>
+          </a:p>
+        </p:txBody>
+      </p:sp>
+    </p:spTree>
+    <p:extLst>
+      <p:ext uri="{BB962C8B-B14F-4D97-AF65-F5344CB8AC3E}">
+        <p14:creationId xmlns:p14="http://schemas.microsoft.com/office/powerpoint/2010/main" val="1920680452"/>
       </p:ext>
     </p:extLst>
   </p:cSld>
@@ -5510,6 +5908,2054 @@
     <p:extLst>
       <p:ext uri="{BB962C8B-B14F-4D97-AF65-F5344CB8AC3E}">
         <p14:creationId xmlns:p14="http://schemas.microsoft.com/office/powerpoint/2010/main" val="1430733189"/>
+      </p:ext>
+    </p:extLst>
+  </p:cSld>
+  <p:clrMapOvr>
+    <a:masterClrMapping/>
+  </p:clrMapOvr>
+</p:sld>
+</file>
+
+<file path=ppt/slides/slide20.xml><?xml version="1.0" encoding="utf-8"?>
+<p:sld xmlns:a="http://schemas.openxmlformats.org/drawingml/2006/main" xmlns:r="http://schemas.openxmlformats.org/officeDocument/2006/relationships" xmlns:p="http://schemas.openxmlformats.org/presentationml/2006/main">
+  <p:cSld>
+    <p:spTree>
+      <p:nvGrpSpPr>
+        <p:cNvPr id="1" name=""/>
+        <p:cNvGrpSpPr/>
+        <p:nvPr/>
+      </p:nvGrpSpPr>
+      <p:grpSpPr>
+        <a:xfrm>
+          <a:off x="0" y="0"/>
+          <a:ext cx="0" cy="0"/>
+          <a:chOff x="0" y="0"/>
+          <a:chExt cx="0" cy="0"/>
+        </a:xfrm>
+      </p:grpSpPr>
+      <p:pic>
+        <p:nvPicPr>
+          <p:cNvPr id="5" name="Picture 4">
+            <a:extLst>
+              <a:ext uri="{FF2B5EF4-FFF2-40B4-BE49-F238E27FC236}">
+                <a16:creationId xmlns:a16="http://schemas.microsoft.com/office/drawing/2014/main" id="{08448BA8-F961-80A3-2C27-795446E61835}"/>
+              </a:ext>
+            </a:extLst>
+          </p:cNvPr>
+          <p:cNvPicPr>
+            <a:picLocks noChangeAspect="1"/>
+          </p:cNvPicPr>
+          <p:nvPr/>
+        </p:nvPicPr>
+        <p:blipFill>
+          <a:blip r:embed="rId2">
+            <a:extLst>
+              <a:ext uri="{28A0092B-C50C-407E-A947-70E740481C1C}">
+                <a14:useLocalDpi xmlns:a14="http://schemas.microsoft.com/office/drawing/2010/main" val="0"/>
+              </a:ext>
+            </a:extLst>
+          </a:blip>
+          <a:stretch>
+            <a:fillRect/>
+          </a:stretch>
+        </p:blipFill>
+        <p:spPr>
+          <a:xfrm>
+            <a:off x="-177799" y="-899459"/>
+            <a:ext cx="7095067" cy="9181851"/>
+          </a:xfrm>
+          <a:prstGeom prst="rect">
+            <a:avLst/>
+          </a:prstGeom>
+        </p:spPr>
+      </p:pic>
+    </p:spTree>
+    <p:extLst>
+      <p:ext uri="{BB962C8B-B14F-4D97-AF65-F5344CB8AC3E}">
+        <p14:creationId xmlns:p14="http://schemas.microsoft.com/office/powerpoint/2010/main" val="3815367926"/>
+      </p:ext>
+    </p:extLst>
+  </p:cSld>
+  <p:clrMapOvr>
+    <a:masterClrMapping/>
+  </p:clrMapOvr>
+</p:sld>
+</file>
+
+<file path=ppt/slides/slide21.xml><?xml version="1.0" encoding="utf-8"?>
+<p:sld xmlns:a="http://schemas.openxmlformats.org/drawingml/2006/main" xmlns:r="http://schemas.openxmlformats.org/officeDocument/2006/relationships" xmlns:p="http://schemas.openxmlformats.org/presentationml/2006/main">
+  <p:cSld>
+    <p:spTree>
+      <p:nvGrpSpPr>
+        <p:cNvPr id="1" name=""/>
+        <p:cNvGrpSpPr/>
+        <p:nvPr/>
+      </p:nvGrpSpPr>
+      <p:grpSpPr>
+        <a:xfrm>
+          <a:off x="0" y="0"/>
+          <a:ext cx="0" cy="0"/>
+          <a:chOff x="0" y="0"/>
+          <a:chExt cx="0" cy="0"/>
+        </a:xfrm>
+      </p:grpSpPr>
+      <p:sp>
+        <p:nvSpPr>
+          <p:cNvPr id="2" name="Title 1">
+            <a:extLst>
+              <a:ext uri="{FF2B5EF4-FFF2-40B4-BE49-F238E27FC236}">
+                <a16:creationId xmlns:a16="http://schemas.microsoft.com/office/drawing/2014/main" id="{EF38AED9-8A2D-7D24-6CA9-24FD16F825FB}"/>
+              </a:ext>
+            </a:extLst>
+          </p:cNvPr>
+          <p:cNvSpPr>
+            <a:spLocks noGrp="1"/>
+          </p:cNvSpPr>
+          <p:nvPr>
+            <p:ph type="title"/>
+          </p:nvPr>
+        </p:nvSpPr>
+        <p:spPr/>
+        <p:txBody>
+          <a:bodyPr/>
+          <a:lstStyle/>
+          <a:p>
+            <a:r>
+              <a:rPr lang="en-US" dirty="0"/>
+              <a:t>MS5611 CONFIGURATION</a:t>
+            </a:r>
+          </a:p>
+        </p:txBody>
+      </p:sp>
+      <p:sp>
+        <p:nvSpPr>
+          <p:cNvPr id="3" name="Content Placeholder 2">
+            <a:extLst>
+              <a:ext uri="{FF2B5EF4-FFF2-40B4-BE49-F238E27FC236}">
+                <a16:creationId xmlns:a16="http://schemas.microsoft.com/office/drawing/2014/main" id="{73E05087-DE99-C752-A938-0F9B6F933631}"/>
+              </a:ext>
+            </a:extLst>
+          </p:cNvPr>
+          <p:cNvSpPr>
+            <a:spLocks noGrp="1"/>
+          </p:cNvSpPr>
+          <p:nvPr>
+            <p:ph idx="1"/>
+          </p:nvPr>
+        </p:nvSpPr>
+        <p:spPr/>
+        <p:txBody>
+          <a:bodyPr/>
+          <a:lstStyle/>
+          <a:p>
+            <a:pPr marL="0" indent="0">
+              <a:buNone/>
+            </a:pPr>
+            <a:r>
+              <a:rPr lang="en-US" b="1" dirty="0"/>
+              <a:t>Read Prom command</a:t>
+            </a:r>
+          </a:p>
+          <a:p>
+            <a:pPr marL="0" indent="0">
+              <a:buNone/>
+            </a:pPr>
+            <a:r>
+              <a:rPr lang="en-US" dirty="0"/>
+              <a:t>According to datasheet, we can get data in prom by following 2 steps below:</a:t>
+            </a:r>
+          </a:p>
+          <a:p>
+            <a:pPr marL="0" indent="0">
+              <a:buNone/>
+            </a:pPr>
+            <a:endParaRPr lang="en-US" dirty="0"/>
+          </a:p>
+          <a:p>
+            <a:pPr marL="0" indent="0">
+              <a:buNone/>
+            </a:pPr>
+            <a:endParaRPr lang="en-US" b="1" dirty="0"/>
+          </a:p>
+        </p:txBody>
+      </p:sp>
+      <p:pic>
+        <p:nvPicPr>
+          <p:cNvPr id="5" name="Picture 4">
+            <a:extLst>
+              <a:ext uri="{FF2B5EF4-FFF2-40B4-BE49-F238E27FC236}">
+                <a16:creationId xmlns:a16="http://schemas.microsoft.com/office/drawing/2014/main" id="{587BF6EA-9781-672D-40F3-91BAB7746BB3}"/>
+              </a:ext>
+            </a:extLst>
+          </p:cNvPr>
+          <p:cNvPicPr>
+            <a:picLocks noChangeAspect="1"/>
+          </p:cNvPicPr>
+          <p:nvPr/>
+        </p:nvPicPr>
+        <p:blipFill>
+          <a:blip r:embed="rId2">
+            <a:extLst>
+              <a:ext uri="{28A0092B-C50C-407E-A947-70E740481C1C}">
+                <a14:useLocalDpi xmlns:a14="http://schemas.microsoft.com/office/drawing/2010/main" val="0"/>
+              </a:ext>
+            </a:extLst>
+          </a:blip>
+          <a:stretch>
+            <a:fillRect/>
+          </a:stretch>
+        </p:blipFill>
+        <p:spPr>
+          <a:xfrm>
+            <a:off x="838200" y="3255297"/>
+            <a:ext cx="5654530" cy="3124471"/>
+          </a:xfrm>
+          <a:prstGeom prst="rect">
+            <a:avLst/>
+          </a:prstGeom>
+        </p:spPr>
+      </p:pic>
+      <p:sp>
+        <p:nvSpPr>
+          <p:cNvPr id="7" name="TextBox 6">
+            <a:extLst>
+              <a:ext uri="{FF2B5EF4-FFF2-40B4-BE49-F238E27FC236}">
+                <a16:creationId xmlns:a16="http://schemas.microsoft.com/office/drawing/2014/main" id="{09847E91-8B48-BBE8-7114-D4987107D21A}"/>
+              </a:ext>
+            </a:extLst>
+          </p:cNvPr>
+          <p:cNvSpPr txBox="1"/>
+          <p:nvPr/>
+        </p:nvSpPr>
+        <p:spPr>
+          <a:xfrm>
+            <a:off x="7119263" y="3255297"/>
+            <a:ext cx="3370937" cy="2308324"/>
+          </a:xfrm>
+          <a:prstGeom prst="rect">
+            <a:avLst/>
+          </a:prstGeom>
+          <a:noFill/>
+        </p:spPr>
+        <p:txBody>
+          <a:bodyPr wrap="square">
+            <a:spAutoFit/>
+          </a:bodyPr>
+          <a:lstStyle/>
+          <a:p>
+            <a:r>
+              <a:rPr lang="en-US" dirty="0"/>
+              <a:t>#define CMD_PROM_C0 0xA0</a:t>
+            </a:r>
+          </a:p>
+          <a:p>
+            <a:r>
+              <a:rPr lang="en-US" dirty="0"/>
+              <a:t>#define CMD_PROM_C1 0xA2</a:t>
+            </a:r>
+          </a:p>
+          <a:p>
+            <a:r>
+              <a:rPr lang="en-US" dirty="0"/>
+              <a:t>#define CMD_PROM_C2 0xA4</a:t>
+            </a:r>
+          </a:p>
+          <a:p>
+            <a:r>
+              <a:rPr lang="en-US" dirty="0"/>
+              <a:t>#define CMD_PROM_C3 0xA6</a:t>
+            </a:r>
+          </a:p>
+          <a:p>
+            <a:r>
+              <a:rPr lang="en-US" dirty="0"/>
+              <a:t>#define CMD_PROM_C4 0xA8</a:t>
+            </a:r>
+          </a:p>
+          <a:p>
+            <a:r>
+              <a:rPr lang="en-US" dirty="0"/>
+              <a:t>#define CMD_PROM_C5 0xAA</a:t>
+            </a:r>
+          </a:p>
+          <a:p>
+            <a:r>
+              <a:rPr lang="en-US" dirty="0"/>
+              <a:t>#define CMD_PROM_C6 0xAC</a:t>
+            </a:r>
+          </a:p>
+          <a:p>
+            <a:r>
+              <a:rPr lang="en-US" dirty="0"/>
+              <a:t>#define CMD_PROM_C7 0xAE</a:t>
+            </a:r>
+          </a:p>
+        </p:txBody>
+      </p:sp>
+    </p:spTree>
+    <p:extLst>
+      <p:ext uri="{BB962C8B-B14F-4D97-AF65-F5344CB8AC3E}">
+        <p14:creationId xmlns:p14="http://schemas.microsoft.com/office/powerpoint/2010/main" val="3441113987"/>
+      </p:ext>
+    </p:extLst>
+  </p:cSld>
+  <p:clrMapOvr>
+    <a:masterClrMapping/>
+  </p:clrMapOvr>
+</p:sld>
+</file>
+
+<file path=ppt/slides/slide22.xml><?xml version="1.0" encoding="utf-8"?>
+<p:sld xmlns:a="http://schemas.openxmlformats.org/drawingml/2006/main" xmlns:r="http://schemas.openxmlformats.org/officeDocument/2006/relationships" xmlns:p="http://schemas.openxmlformats.org/presentationml/2006/main">
+  <p:cSld>
+    <p:spTree>
+      <p:nvGrpSpPr>
+        <p:cNvPr id="1" name=""/>
+        <p:cNvGrpSpPr/>
+        <p:nvPr/>
+      </p:nvGrpSpPr>
+      <p:grpSpPr>
+        <a:xfrm>
+          <a:off x="0" y="0"/>
+          <a:ext cx="0" cy="0"/>
+          <a:chOff x="0" y="0"/>
+          <a:chExt cx="0" cy="0"/>
+        </a:xfrm>
+      </p:grpSpPr>
+      <p:sp>
+        <p:nvSpPr>
+          <p:cNvPr id="2" name="Title 1">
+            <a:extLst>
+              <a:ext uri="{FF2B5EF4-FFF2-40B4-BE49-F238E27FC236}">
+                <a16:creationId xmlns:a16="http://schemas.microsoft.com/office/drawing/2014/main" id="{D81E3837-A1E4-2AA3-7B32-BB7AAD462CED}"/>
+              </a:ext>
+            </a:extLst>
+          </p:cNvPr>
+          <p:cNvSpPr>
+            <a:spLocks noGrp="1"/>
+          </p:cNvSpPr>
+          <p:nvPr>
+            <p:ph type="title"/>
+          </p:nvPr>
+        </p:nvSpPr>
+        <p:spPr/>
+        <p:txBody>
+          <a:bodyPr/>
+          <a:lstStyle/>
+          <a:p>
+            <a:r>
+              <a:rPr lang="en-US" dirty="0"/>
+              <a:t>MS5611 CONFIGURATION</a:t>
+            </a:r>
+          </a:p>
+        </p:txBody>
+      </p:sp>
+      <p:sp>
+        <p:nvSpPr>
+          <p:cNvPr id="3" name="Content Placeholder 2">
+            <a:extLst>
+              <a:ext uri="{FF2B5EF4-FFF2-40B4-BE49-F238E27FC236}">
+                <a16:creationId xmlns:a16="http://schemas.microsoft.com/office/drawing/2014/main" id="{F9AC3BC4-F5E1-C946-4E1D-8CF0070118C8}"/>
+              </a:ext>
+            </a:extLst>
+          </p:cNvPr>
+          <p:cNvSpPr>
+            <a:spLocks noGrp="1"/>
+          </p:cNvSpPr>
+          <p:nvPr>
+            <p:ph idx="1"/>
+          </p:nvPr>
+        </p:nvSpPr>
+        <p:spPr/>
+        <p:txBody>
+          <a:bodyPr/>
+          <a:lstStyle/>
+          <a:p>
+            <a:pPr marL="0" indent="0">
+              <a:buNone/>
+            </a:pPr>
+            <a:r>
+              <a:rPr lang="en-US" dirty="0"/>
+              <a:t>However, you can read them directly from their addresses (all defined commands above are also their addresses) like I did in my code. </a:t>
+            </a:r>
+          </a:p>
+          <a:p>
+            <a:pPr marL="0" indent="0">
+              <a:buNone/>
+            </a:pPr>
+            <a:r>
+              <a:rPr lang="en-US" dirty="0"/>
+              <a:t>Example:</a:t>
+            </a:r>
+          </a:p>
+          <a:p>
+            <a:pPr marL="0" indent="0">
+              <a:buNone/>
+            </a:pPr>
+            <a:r>
+              <a:rPr lang="en-US" sz="1600" dirty="0" err="1">
+                <a:solidFill>
+                  <a:srgbClr val="0070C0"/>
+                </a:solidFill>
+                <a:highlight>
+                  <a:srgbClr val="FFFF00"/>
+                </a:highlight>
+              </a:rPr>
+              <a:t>DataStruct</a:t>
+            </a:r>
+            <a:r>
+              <a:rPr lang="en-US" sz="1600" dirty="0">
+                <a:solidFill>
+                  <a:srgbClr val="0070C0"/>
+                </a:solidFill>
+                <a:highlight>
+                  <a:srgbClr val="FFFF00"/>
+                </a:highlight>
+              </a:rPr>
+              <a:t>-&gt;C[1] = wiringPiI2CReadReg8(fd_MS,CMD_PROM_C1) &lt;&lt; 8 | wiringPiI2CReadReg8(fd_MS,CMD_PROM_C1 + 1);</a:t>
+            </a:r>
+          </a:p>
+          <a:p>
+            <a:pPr marL="0" indent="0">
+              <a:buNone/>
+            </a:pPr>
+            <a:endParaRPr lang="en-US" sz="1600" dirty="0">
+              <a:solidFill>
+                <a:srgbClr val="0070C0"/>
+              </a:solidFill>
+              <a:highlight>
+                <a:srgbClr val="FFFF00"/>
+              </a:highlight>
+            </a:endParaRPr>
+          </a:p>
+        </p:txBody>
+      </p:sp>
+      <p:pic>
+        <p:nvPicPr>
+          <p:cNvPr id="5" name="Picture 4">
+            <a:extLst>
+              <a:ext uri="{FF2B5EF4-FFF2-40B4-BE49-F238E27FC236}">
+                <a16:creationId xmlns:a16="http://schemas.microsoft.com/office/drawing/2014/main" id="{3C36A7F6-41A0-63CE-8AEE-F68598E36DBE}"/>
+              </a:ext>
+            </a:extLst>
+          </p:cNvPr>
+          <p:cNvPicPr>
+            <a:picLocks noChangeAspect="1"/>
+          </p:cNvPicPr>
+          <p:nvPr/>
+        </p:nvPicPr>
+        <p:blipFill>
+          <a:blip r:embed="rId2">
+            <a:extLst>
+              <a:ext uri="{28A0092B-C50C-407E-A947-70E740481C1C}">
+                <a14:useLocalDpi xmlns:a14="http://schemas.microsoft.com/office/drawing/2010/main" val="0"/>
+              </a:ext>
+            </a:extLst>
+          </a:blip>
+          <a:stretch>
+            <a:fillRect/>
+          </a:stretch>
+        </p:blipFill>
+        <p:spPr>
+          <a:xfrm>
+            <a:off x="939430" y="3807363"/>
+            <a:ext cx="8535140" cy="2240474"/>
+          </a:xfrm>
+          <a:prstGeom prst="rect">
+            <a:avLst/>
+          </a:prstGeom>
+        </p:spPr>
+      </p:pic>
+    </p:spTree>
+    <p:extLst>
+      <p:ext uri="{BB962C8B-B14F-4D97-AF65-F5344CB8AC3E}">
+        <p14:creationId xmlns:p14="http://schemas.microsoft.com/office/powerpoint/2010/main" val="1678350340"/>
+      </p:ext>
+    </p:extLst>
+  </p:cSld>
+  <p:clrMapOvr>
+    <a:masterClrMapping/>
+  </p:clrMapOvr>
+</p:sld>
+</file>
+
+<file path=ppt/slides/slide23.xml><?xml version="1.0" encoding="utf-8"?>
+<p:sld xmlns:a="http://schemas.openxmlformats.org/drawingml/2006/main" xmlns:r="http://schemas.openxmlformats.org/officeDocument/2006/relationships" xmlns:p="http://schemas.openxmlformats.org/presentationml/2006/main">
+  <p:cSld>
+    <p:spTree>
+      <p:nvGrpSpPr>
+        <p:cNvPr id="1" name=""/>
+        <p:cNvGrpSpPr/>
+        <p:nvPr/>
+      </p:nvGrpSpPr>
+      <p:grpSpPr>
+        <a:xfrm>
+          <a:off x="0" y="0"/>
+          <a:ext cx="0" cy="0"/>
+          <a:chOff x="0" y="0"/>
+          <a:chExt cx="0" cy="0"/>
+        </a:xfrm>
+      </p:grpSpPr>
+      <p:sp>
+        <p:nvSpPr>
+          <p:cNvPr id="2" name="Title 1">
+            <a:extLst>
+              <a:ext uri="{FF2B5EF4-FFF2-40B4-BE49-F238E27FC236}">
+                <a16:creationId xmlns:a16="http://schemas.microsoft.com/office/drawing/2014/main" id="{8B87BBBA-B61E-F81D-0940-8C131A82E3D2}"/>
+              </a:ext>
+            </a:extLst>
+          </p:cNvPr>
+          <p:cNvSpPr>
+            <a:spLocks noGrp="1"/>
+          </p:cNvSpPr>
+          <p:nvPr>
+            <p:ph type="title"/>
+          </p:nvPr>
+        </p:nvSpPr>
+        <p:spPr/>
+        <p:txBody>
+          <a:bodyPr/>
+          <a:lstStyle/>
+          <a:p>
+            <a:r>
+              <a:rPr lang="en-US" dirty="0"/>
+              <a:t>MS5611 CONFIGURATION</a:t>
+            </a:r>
+          </a:p>
+        </p:txBody>
+      </p:sp>
+      <p:sp>
+        <p:nvSpPr>
+          <p:cNvPr id="3" name="Content Placeholder 2">
+            <a:extLst>
+              <a:ext uri="{FF2B5EF4-FFF2-40B4-BE49-F238E27FC236}">
+                <a16:creationId xmlns:a16="http://schemas.microsoft.com/office/drawing/2014/main" id="{26C87131-0407-7BDA-082B-B5C7015B5DB8}"/>
+              </a:ext>
+            </a:extLst>
+          </p:cNvPr>
+          <p:cNvSpPr>
+            <a:spLocks noGrp="1"/>
+          </p:cNvSpPr>
+          <p:nvPr>
+            <p:ph idx="1"/>
+          </p:nvPr>
+        </p:nvSpPr>
+        <p:spPr/>
+        <p:txBody>
+          <a:bodyPr/>
+          <a:lstStyle/>
+          <a:p>
+            <a:pPr marL="0" indent="0">
+              <a:buNone/>
+            </a:pPr>
+            <a:r>
+              <a:rPr lang="en-US" b="1" dirty="0"/>
+              <a:t>Read digital result</a:t>
+            </a:r>
+          </a:p>
+          <a:p>
+            <a:pPr marL="0" indent="0">
+              <a:buNone/>
+            </a:pPr>
+            <a:r>
+              <a:rPr lang="en-US" dirty="0"/>
+              <a:t>To read digital result we follow 3 steps from datasheet</a:t>
+            </a:r>
+          </a:p>
+        </p:txBody>
+      </p:sp>
+      <p:pic>
+        <p:nvPicPr>
+          <p:cNvPr id="5" name="Picture 4">
+            <a:extLst>
+              <a:ext uri="{FF2B5EF4-FFF2-40B4-BE49-F238E27FC236}">
+                <a16:creationId xmlns:a16="http://schemas.microsoft.com/office/drawing/2014/main" id="{40A05F96-0775-FE4F-53B9-1366754A3140}"/>
+              </a:ext>
+            </a:extLst>
+          </p:cNvPr>
+          <p:cNvPicPr>
+            <a:picLocks noChangeAspect="1"/>
+          </p:cNvPicPr>
+          <p:nvPr/>
+        </p:nvPicPr>
+        <p:blipFill>
+          <a:blip r:embed="rId2">
+            <a:extLst>
+              <a:ext uri="{28A0092B-C50C-407E-A947-70E740481C1C}">
+                <a14:useLocalDpi xmlns:a14="http://schemas.microsoft.com/office/drawing/2010/main" val="0"/>
+              </a:ext>
+            </a:extLst>
+          </a:blip>
+          <a:stretch>
+            <a:fillRect/>
+          </a:stretch>
+        </p:blipFill>
+        <p:spPr>
+          <a:xfrm>
+            <a:off x="838200" y="3005054"/>
+            <a:ext cx="6148823" cy="3407782"/>
+          </a:xfrm>
+          <a:prstGeom prst="rect">
+            <a:avLst/>
+          </a:prstGeom>
+        </p:spPr>
+      </p:pic>
+    </p:spTree>
+    <p:extLst>
+      <p:ext uri="{BB962C8B-B14F-4D97-AF65-F5344CB8AC3E}">
+        <p14:creationId xmlns:p14="http://schemas.microsoft.com/office/powerpoint/2010/main" val="1077551907"/>
+      </p:ext>
+    </p:extLst>
+  </p:cSld>
+  <p:clrMapOvr>
+    <a:masterClrMapping/>
+  </p:clrMapOvr>
+</p:sld>
+</file>
+
+<file path=ppt/slides/slide24.xml><?xml version="1.0" encoding="utf-8"?>
+<p:sld xmlns:a="http://schemas.openxmlformats.org/drawingml/2006/main" xmlns:r="http://schemas.openxmlformats.org/officeDocument/2006/relationships" xmlns:p="http://schemas.openxmlformats.org/presentationml/2006/main">
+  <p:cSld>
+    <p:spTree>
+      <p:nvGrpSpPr>
+        <p:cNvPr id="1" name=""/>
+        <p:cNvGrpSpPr/>
+        <p:nvPr/>
+      </p:nvGrpSpPr>
+      <p:grpSpPr>
+        <a:xfrm>
+          <a:off x="0" y="0"/>
+          <a:ext cx="0" cy="0"/>
+          <a:chOff x="0" y="0"/>
+          <a:chExt cx="0" cy="0"/>
+        </a:xfrm>
+      </p:grpSpPr>
+      <p:sp>
+        <p:nvSpPr>
+          <p:cNvPr id="2" name="Title 1">
+            <a:extLst>
+              <a:ext uri="{FF2B5EF4-FFF2-40B4-BE49-F238E27FC236}">
+                <a16:creationId xmlns:a16="http://schemas.microsoft.com/office/drawing/2014/main" id="{2C929AD3-CD12-8D1B-22DD-0497A90D82E4}"/>
+              </a:ext>
+            </a:extLst>
+          </p:cNvPr>
+          <p:cNvSpPr>
+            <a:spLocks noGrp="1"/>
+          </p:cNvSpPr>
+          <p:nvPr>
+            <p:ph type="title"/>
+          </p:nvPr>
+        </p:nvSpPr>
+        <p:spPr/>
+        <p:txBody>
+          <a:bodyPr/>
+          <a:lstStyle/>
+          <a:p>
+            <a:r>
+              <a:rPr lang="en-US" dirty="0"/>
+              <a:t>MS5611 CONFIGURATION</a:t>
+            </a:r>
+          </a:p>
+        </p:txBody>
+      </p:sp>
+      <p:sp>
+        <p:nvSpPr>
+          <p:cNvPr id="3" name="Content Placeholder 2">
+            <a:extLst>
+              <a:ext uri="{FF2B5EF4-FFF2-40B4-BE49-F238E27FC236}">
+                <a16:creationId xmlns:a16="http://schemas.microsoft.com/office/drawing/2014/main" id="{BB270B6F-93DF-77DC-DEDE-C13840C08920}"/>
+              </a:ext>
+            </a:extLst>
+          </p:cNvPr>
+          <p:cNvSpPr>
+            <a:spLocks noGrp="1"/>
+          </p:cNvSpPr>
+          <p:nvPr>
+            <p:ph idx="1"/>
+          </p:nvPr>
+        </p:nvSpPr>
+        <p:spPr/>
+        <p:txBody>
+          <a:bodyPr/>
+          <a:lstStyle/>
+          <a:p>
+            <a:pPr marL="0" indent="0">
+              <a:buNone/>
+            </a:pPr>
+            <a:r>
+              <a:rPr lang="en-US" dirty="0"/>
+              <a:t>Step 1:</a:t>
+            </a:r>
+          </a:p>
+          <a:p>
+            <a:pPr marL="0" indent="0">
+              <a:buNone/>
+            </a:pPr>
+            <a:r>
+              <a:rPr lang="en-US" dirty="0"/>
+              <a:t>	Setting OSR (oversampling rate) for pressure and temperature </a:t>
+            </a:r>
+          </a:p>
+        </p:txBody>
+      </p:sp>
+      <p:pic>
+        <p:nvPicPr>
+          <p:cNvPr id="7" name="Picture 6">
+            <a:extLst>
+              <a:ext uri="{FF2B5EF4-FFF2-40B4-BE49-F238E27FC236}">
+                <a16:creationId xmlns:a16="http://schemas.microsoft.com/office/drawing/2014/main" id="{9B3CD0F5-AB9C-E6F7-389C-B091774D7E2A}"/>
+              </a:ext>
+            </a:extLst>
+          </p:cNvPr>
+          <p:cNvPicPr>
+            <a:picLocks noChangeAspect="1"/>
+          </p:cNvPicPr>
+          <p:nvPr/>
+        </p:nvPicPr>
+        <p:blipFill>
+          <a:blip r:embed="rId3"/>
+          <a:stretch>
+            <a:fillRect/>
+          </a:stretch>
+        </p:blipFill>
+        <p:spPr>
+          <a:xfrm>
+            <a:off x="838200" y="3040346"/>
+            <a:ext cx="4679085" cy="777307"/>
+          </a:xfrm>
+          <a:prstGeom prst="rect">
+            <a:avLst/>
+          </a:prstGeom>
+        </p:spPr>
+      </p:pic>
+      <p:sp>
+        <p:nvSpPr>
+          <p:cNvPr id="9" name="TextBox 8">
+            <a:extLst>
+              <a:ext uri="{FF2B5EF4-FFF2-40B4-BE49-F238E27FC236}">
+                <a16:creationId xmlns:a16="http://schemas.microsoft.com/office/drawing/2014/main" id="{73CD27EC-3AD6-4D59-A9DF-55CDA294BD00}"/>
+              </a:ext>
+            </a:extLst>
+          </p:cNvPr>
+          <p:cNvSpPr txBox="1"/>
+          <p:nvPr/>
+        </p:nvSpPr>
+        <p:spPr>
+          <a:xfrm>
+            <a:off x="6307666" y="3037642"/>
+            <a:ext cx="3606800" cy="3693319"/>
+          </a:xfrm>
+          <a:prstGeom prst="rect">
+            <a:avLst/>
+          </a:prstGeom>
+          <a:noFill/>
+        </p:spPr>
+        <p:txBody>
+          <a:bodyPr wrap="square">
+            <a:spAutoFit/>
+          </a:bodyPr>
+          <a:lstStyle/>
+          <a:p>
+            <a:r>
+              <a:rPr lang="en-US" dirty="0" err="1">
+                <a:highlight>
+                  <a:srgbClr val="FFFF00"/>
+                </a:highlight>
+              </a:rPr>
+              <a:t>Cmd</a:t>
+            </a:r>
+            <a:r>
+              <a:rPr lang="en-US" dirty="0">
+                <a:highlight>
+                  <a:srgbClr val="FFFF00"/>
+                </a:highlight>
+              </a:rPr>
+              <a:t> byte</a:t>
+            </a:r>
+          </a:p>
+          <a:p>
+            <a:r>
+              <a:rPr lang="en-US" dirty="0">
+                <a:highlight>
+                  <a:srgbClr val="00FF00"/>
+                </a:highlight>
+              </a:rPr>
+              <a:t>Pressure:</a:t>
+            </a:r>
+          </a:p>
+          <a:p>
+            <a:r>
+              <a:rPr lang="en-US" dirty="0"/>
+              <a:t>#define PRESSURE_OSR_256 0x40</a:t>
+            </a:r>
+          </a:p>
+          <a:p>
+            <a:r>
+              <a:rPr lang="en-US" dirty="0"/>
+              <a:t>#define PRESSURE_OSR_512 0x42</a:t>
+            </a:r>
+          </a:p>
+          <a:p>
+            <a:r>
+              <a:rPr lang="en-US" dirty="0"/>
+              <a:t>#define PRESSURE_OSR_1024 0x44</a:t>
+            </a:r>
+          </a:p>
+          <a:p>
+            <a:r>
+              <a:rPr lang="en-US" dirty="0"/>
+              <a:t>#define PRESSURE_OSR_2048 0x46</a:t>
+            </a:r>
+          </a:p>
+          <a:p>
+            <a:r>
+              <a:rPr lang="en-US" dirty="0"/>
+              <a:t>#define PRESSURE_OSR_4096 0x48</a:t>
+            </a:r>
+          </a:p>
+          <a:p>
+            <a:r>
+              <a:rPr lang="en-US" dirty="0">
+                <a:highlight>
+                  <a:srgbClr val="00FF00"/>
+                </a:highlight>
+              </a:rPr>
+              <a:t>Temperature:</a:t>
+            </a:r>
+            <a:endParaRPr lang="en-US" dirty="0"/>
+          </a:p>
+          <a:p>
+            <a:r>
+              <a:rPr lang="en-US" dirty="0"/>
+              <a:t>#define TEMP_OSR_256 0x50</a:t>
+            </a:r>
+          </a:p>
+          <a:p>
+            <a:r>
+              <a:rPr lang="en-US" dirty="0"/>
+              <a:t>#define TEMP_OSR_512 0x52</a:t>
+            </a:r>
+          </a:p>
+          <a:p>
+            <a:r>
+              <a:rPr lang="en-US" dirty="0"/>
+              <a:t>#define TEMP_OSR_1024 0x54</a:t>
+            </a:r>
+          </a:p>
+          <a:p>
+            <a:r>
+              <a:rPr lang="en-US" dirty="0"/>
+              <a:t>#define TEMP_OSR_2048 0x56</a:t>
+            </a:r>
+          </a:p>
+          <a:p>
+            <a:r>
+              <a:rPr lang="en-US" dirty="0"/>
+              <a:t>#define TEMP_OSR_4096 0x58</a:t>
+            </a:r>
+          </a:p>
+        </p:txBody>
+      </p:sp>
+    </p:spTree>
+    <p:extLst>
+      <p:ext uri="{BB962C8B-B14F-4D97-AF65-F5344CB8AC3E}">
+        <p14:creationId xmlns:p14="http://schemas.microsoft.com/office/powerpoint/2010/main" val="2687970832"/>
+      </p:ext>
+    </p:extLst>
+  </p:cSld>
+  <p:clrMapOvr>
+    <a:masterClrMapping/>
+  </p:clrMapOvr>
+</p:sld>
+</file>
+
+<file path=ppt/slides/slide25.xml><?xml version="1.0" encoding="utf-8"?>
+<p:sld xmlns:a="http://schemas.openxmlformats.org/drawingml/2006/main" xmlns:r="http://schemas.openxmlformats.org/officeDocument/2006/relationships" xmlns:p="http://schemas.openxmlformats.org/presentationml/2006/main">
+  <p:cSld>
+    <p:spTree>
+      <p:nvGrpSpPr>
+        <p:cNvPr id="1" name=""/>
+        <p:cNvGrpSpPr/>
+        <p:nvPr/>
+      </p:nvGrpSpPr>
+      <p:grpSpPr>
+        <a:xfrm>
+          <a:off x="0" y="0"/>
+          <a:ext cx="0" cy="0"/>
+          <a:chOff x="0" y="0"/>
+          <a:chExt cx="0" cy="0"/>
+        </a:xfrm>
+      </p:grpSpPr>
+      <p:sp>
+        <p:nvSpPr>
+          <p:cNvPr id="2" name="Title 1">
+            <a:extLst>
+              <a:ext uri="{FF2B5EF4-FFF2-40B4-BE49-F238E27FC236}">
+                <a16:creationId xmlns:a16="http://schemas.microsoft.com/office/drawing/2014/main" id="{AA7C4FE6-B819-74A1-63A1-5EC049D078E2}"/>
+              </a:ext>
+            </a:extLst>
+          </p:cNvPr>
+          <p:cNvSpPr>
+            <a:spLocks noGrp="1"/>
+          </p:cNvSpPr>
+          <p:nvPr>
+            <p:ph type="title"/>
+          </p:nvPr>
+        </p:nvSpPr>
+        <p:spPr/>
+        <p:txBody>
+          <a:bodyPr/>
+          <a:lstStyle/>
+          <a:p>
+            <a:r>
+              <a:rPr lang="en-US" dirty="0"/>
+              <a:t>MS5611 CONFIGURATION</a:t>
+            </a:r>
+          </a:p>
+        </p:txBody>
+      </p:sp>
+      <p:sp>
+        <p:nvSpPr>
+          <p:cNvPr id="3" name="Content Placeholder 2">
+            <a:extLst>
+              <a:ext uri="{FF2B5EF4-FFF2-40B4-BE49-F238E27FC236}">
+                <a16:creationId xmlns:a16="http://schemas.microsoft.com/office/drawing/2014/main" id="{F6EB149F-3AD1-0D82-8D58-0F531936417F}"/>
+              </a:ext>
+            </a:extLst>
+          </p:cNvPr>
+          <p:cNvSpPr>
+            <a:spLocks noGrp="1"/>
+          </p:cNvSpPr>
+          <p:nvPr>
+            <p:ph idx="1"/>
+          </p:nvPr>
+        </p:nvSpPr>
+        <p:spPr/>
+        <p:txBody>
+          <a:bodyPr/>
+          <a:lstStyle/>
+          <a:p>
+            <a:pPr marL="0" indent="0">
+              <a:buNone/>
+            </a:pPr>
+            <a:r>
+              <a:rPr lang="en-US" dirty="0"/>
+              <a:t>After setting OSR, device stays in busy until finishing conversion (conversion time). This means, we only read data after conversion time. You can use delay or interrupt to read data.</a:t>
+            </a:r>
+          </a:p>
+        </p:txBody>
+      </p:sp>
+      <p:pic>
+        <p:nvPicPr>
+          <p:cNvPr id="5" name="Picture 4">
+            <a:extLst>
+              <a:ext uri="{FF2B5EF4-FFF2-40B4-BE49-F238E27FC236}">
+                <a16:creationId xmlns:a16="http://schemas.microsoft.com/office/drawing/2014/main" id="{0CDA4112-D09B-D33E-2EFC-004CA1405AB1}"/>
+              </a:ext>
+            </a:extLst>
+          </p:cNvPr>
+          <p:cNvPicPr>
+            <a:picLocks noChangeAspect="1"/>
+          </p:cNvPicPr>
+          <p:nvPr/>
+        </p:nvPicPr>
+        <p:blipFill>
+          <a:blip r:embed="rId2"/>
+          <a:stretch>
+            <a:fillRect/>
+          </a:stretch>
+        </p:blipFill>
+        <p:spPr>
+          <a:xfrm>
+            <a:off x="838200" y="3174452"/>
+            <a:ext cx="10720187" cy="2168015"/>
+          </a:xfrm>
+          <a:prstGeom prst="rect">
+            <a:avLst/>
+          </a:prstGeom>
+        </p:spPr>
+      </p:pic>
+    </p:spTree>
+    <p:extLst>
+      <p:ext uri="{BB962C8B-B14F-4D97-AF65-F5344CB8AC3E}">
+        <p14:creationId xmlns:p14="http://schemas.microsoft.com/office/powerpoint/2010/main" val="3930829462"/>
+      </p:ext>
+    </p:extLst>
+  </p:cSld>
+  <p:clrMapOvr>
+    <a:masterClrMapping/>
+  </p:clrMapOvr>
+</p:sld>
+</file>
+
+<file path=ppt/slides/slide26.xml><?xml version="1.0" encoding="utf-8"?>
+<p:sld xmlns:a="http://schemas.openxmlformats.org/drawingml/2006/main" xmlns:r="http://schemas.openxmlformats.org/officeDocument/2006/relationships" xmlns:p="http://schemas.openxmlformats.org/presentationml/2006/main">
+  <p:cSld>
+    <p:spTree>
+      <p:nvGrpSpPr>
+        <p:cNvPr id="1" name=""/>
+        <p:cNvGrpSpPr/>
+        <p:nvPr/>
+      </p:nvGrpSpPr>
+      <p:grpSpPr>
+        <a:xfrm>
+          <a:off x="0" y="0"/>
+          <a:ext cx="0" cy="0"/>
+          <a:chOff x="0" y="0"/>
+          <a:chExt cx="0" cy="0"/>
+        </a:xfrm>
+      </p:grpSpPr>
+      <p:sp>
+        <p:nvSpPr>
+          <p:cNvPr id="2" name="Title 1">
+            <a:extLst>
+              <a:ext uri="{FF2B5EF4-FFF2-40B4-BE49-F238E27FC236}">
+                <a16:creationId xmlns:a16="http://schemas.microsoft.com/office/drawing/2014/main" id="{82A78810-DDE5-D3DA-61EB-AFEBEC85A13A}"/>
+              </a:ext>
+            </a:extLst>
+          </p:cNvPr>
+          <p:cNvSpPr>
+            <a:spLocks noGrp="1"/>
+          </p:cNvSpPr>
+          <p:nvPr>
+            <p:ph type="title"/>
+          </p:nvPr>
+        </p:nvSpPr>
+        <p:spPr/>
+        <p:txBody>
+          <a:bodyPr/>
+          <a:lstStyle/>
+          <a:p>
+            <a:r>
+              <a:rPr lang="en-US" dirty="0"/>
+              <a:t>MS5611 CONFIGURATION</a:t>
+            </a:r>
+          </a:p>
+        </p:txBody>
+      </p:sp>
+      <p:sp>
+        <p:nvSpPr>
+          <p:cNvPr id="3" name="Content Placeholder 2">
+            <a:extLst>
+              <a:ext uri="{FF2B5EF4-FFF2-40B4-BE49-F238E27FC236}">
+                <a16:creationId xmlns:a16="http://schemas.microsoft.com/office/drawing/2014/main" id="{5B270ED6-CC8F-64E9-5E45-9E97EA943D80}"/>
+              </a:ext>
+            </a:extLst>
+          </p:cNvPr>
+          <p:cNvSpPr>
+            <a:spLocks noGrp="1"/>
+          </p:cNvSpPr>
+          <p:nvPr>
+            <p:ph idx="1"/>
+          </p:nvPr>
+        </p:nvSpPr>
+        <p:spPr>
+          <a:xfrm>
+            <a:off x="838200" y="1834092"/>
+            <a:ext cx="10515600" cy="4351338"/>
+          </a:xfrm>
+        </p:spPr>
+        <p:txBody>
+          <a:bodyPr/>
+          <a:lstStyle/>
+          <a:p>
+            <a:pPr marL="0" indent="0">
+              <a:buNone/>
+            </a:pPr>
+            <a:r>
+              <a:rPr lang="en-US" dirty="0"/>
+              <a:t>Step 2: Sending I2C ADC read sequence </a:t>
+            </a:r>
+          </a:p>
+          <a:p>
+            <a:pPr marL="0" indent="0">
+              <a:buNone/>
+            </a:pPr>
+            <a:endParaRPr lang="en-US" dirty="0"/>
+          </a:p>
+          <a:p>
+            <a:pPr marL="0" indent="0">
+              <a:buNone/>
+            </a:pPr>
+            <a:endParaRPr lang="en-US" dirty="0"/>
+          </a:p>
+          <a:p>
+            <a:pPr marL="0" indent="0">
+              <a:buNone/>
+            </a:pPr>
+            <a:r>
+              <a:rPr lang="en-US" dirty="0"/>
+              <a:t>Step 3: Read data</a:t>
+            </a:r>
+          </a:p>
+        </p:txBody>
+      </p:sp>
+      <p:pic>
+        <p:nvPicPr>
+          <p:cNvPr id="6" name="Picture 5">
+            <a:extLst>
+              <a:ext uri="{FF2B5EF4-FFF2-40B4-BE49-F238E27FC236}">
+                <a16:creationId xmlns:a16="http://schemas.microsoft.com/office/drawing/2014/main" id="{636A75A6-08C2-1370-323C-306535E83352}"/>
+              </a:ext>
+            </a:extLst>
+          </p:cNvPr>
+          <p:cNvPicPr>
+            <a:picLocks noChangeAspect="1"/>
+          </p:cNvPicPr>
+          <p:nvPr/>
+        </p:nvPicPr>
+        <p:blipFill>
+          <a:blip r:embed="rId2"/>
+          <a:stretch>
+            <a:fillRect/>
+          </a:stretch>
+        </p:blipFill>
+        <p:spPr>
+          <a:xfrm>
+            <a:off x="956733" y="2439213"/>
+            <a:ext cx="4902200" cy="814372"/>
+          </a:xfrm>
+          <a:prstGeom prst="rect">
+            <a:avLst/>
+          </a:prstGeom>
+        </p:spPr>
+      </p:pic>
+      <p:sp>
+        <p:nvSpPr>
+          <p:cNvPr id="8" name="TextBox 7">
+            <a:extLst>
+              <a:ext uri="{FF2B5EF4-FFF2-40B4-BE49-F238E27FC236}">
+                <a16:creationId xmlns:a16="http://schemas.microsoft.com/office/drawing/2014/main" id="{0D8A6E7A-B03B-F281-CC01-77FA9856FA46}"/>
+              </a:ext>
+            </a:extLst>
+          </p:cNvPr>
+          <p:cNvSpPr txBox="1"/>
+          <p:nvPr/>
+        </p:nvSpPr>
+        <p:spPr>
+          <a:xfrm>
+            <a:off x="6510867" y="2477067"/>
+            <a:ext cx="2760133" cy="646331"/>
+          </a:xfrm>
+          <a:prstGeom prst="rect">
+            <a:avLst/>
+          </a:prstGeom>
+          <a:noFill/>
+        </p:spPr>
+        <p:txBody>
+          <a:bodyPr wrap="square">
+            <a:spAutoFit/>
+          </a:bodyPr>
+          <a:lstStyle/>
+          <a:p>
+            <a:r>
+              <a:rPr lang="en-US" dirty="0" err="1">
+                <a:highlight>
+                  <a:srgbClr val="00FF00"/>
+                </a:highlight>
+              </a:rPr>
+              <a:t>Cmd</a:t>
+            </a:r>
+            <a:r>
+              <a:rPr lang="en-US" dirty="0">
+                <a:highlight>
+                  <a:srgbClr val="00FF00"/>
+                </a:highlight>
+              </a:rPr>
+              <a:t> byte: </a:t>
+            </a:r>
+          </a:p>
+          <a:p>
+            <a:r>
+              <a:rPr lang="en-US" dirty="0"/>
+              <a:t>#define ADC_READ      0x00</a:t>
+            </a:r>
+          </a:p>
+        </p:txBody>
+      </p:sp>
+      <p:pic>
+        <p:nvPicPr>
+          <p:cNvPr id="10" name="Picture 9">
+            <a:extLst>
+              <a:ext uri="{FF2B5EF4-FFF2-40B4-BE49-F238E27FC236}">
+                <a16:creationId xmlns:a16="http://schemas.microsoft.com/office/drawing/2014/main" id="{379777D1-9C0F-5DE4-C9E8-FC3A8A496CF9}"/>
+              </a:ext>
+            </a:extLst>
+          </p:cNvPr>
+          <p:cNvPicPr>
+            <a:picLocks noChangeAspect="1"/>
+          </p:cNvPicPr>
+          <p:nvPr/>
+        </p:nvPicPr>
+        <p:blipFill>
+          <a:blip r:embed="rId3"/>
+          <a:stretch>
+            <a:fillRect/>
+          </a:stretch>
+        </p:blipFill>
+        <p:spPr>
+          <a:xfrm>
+            <a:off x="723087" y="4262484"/>
+            <a:ext cx="8984759" cy="1364098"/>
+          </a:xfrm>
+          <a:prstGeom prst="rect">
+            <a:avLst/>
+          </a:prstGeom>
+        </p:spPr>
+      </p:pic>
+      <p:pic>
+        <p:nvPicPr>
+          <p:cNvPr id="12" name="Picture 11">
+            <a:extLst>
+              <a:ext uri="{FF2B5EF4-FFF2-40B4-BE49-F238E27FC236}">
+                <a16:creationId xmlns:a16="http://schemas.microsoft.com/office/drawing/2014/main" id="{61640F61-0C98-A483-F7FE-9116BA6A1323}"/>
+              </a:ext>
+            </a:extLst>
+          </p:cNvPr>
+          <p:cNvPicPr>
+            <a:picLocks noChangeAspect="1"/>
+          </p:cNvPicPr>
+          <p:nvPr/>
+        </p:nvPicPr>
+        <p:blipFill>
+          <a:blip r:embed="rId4">
+            <a:extLst>
+              <a:ext uri="{28A0092B-C50C-407E-A947-70E740481C1C}">
+                <a14:useLocalDpi xmlns:a14="http://schemas.microsoft.com/office/drawing/2010/main" val="0"/>
+              </a:ext>
+            </a:extLst>
+          </a:blip>
+          <a:stretch>
+            <a:fillRect/>
+          </a:stretch>
+        </p:blipFill>
+        <p:spPr>
+          <a:xfrm>
+            <a:off x="956733" y="5626582"/>
+            <a:ext cx="9327688" cy="1089754"/>
+          </a:xfrm>
+          <a:prstGeom prst="rect">
+            <a:avLst/>
+          </a:prstGeom>
+        </p:spPr>
+      </p:pic>
+    </p:spTree>
+    <p:extLst>
+      <p:ext uri="{BB962C8B-B14F-4D97-AF65-F5344CB8AC3E}">
+        <p14:creationId xmlns:p14="http://schemas.microsoft.com/office/powerpoint/2010/main" val="147084496"/>
+      </p:ext>
+    </p:extLst>
+  </p:cSld>
+  <p:clrMapOvr>
+    <a:masterClrMapping/>
+  </p:clrMapOvr>
+</p:sld>
+</file>
+
+<file path=ppt/slides/slide27.xml><?xml version="1.0" encoding="utf-8"?>
+<p:sld xmlns:a="http://schemas.openxmlformats.org/drawingml/2006/main" xmlns:r="http://schemas.openxmlformats.org/officeDocument/2006/relationships" xmlns:p="http://schemas.openxmlformats.org/presentationml/2006/main">
+  <p:cSld>
+    <p:spTree>
+      <p:nvGrpSpPr>
+        <p:cNvPr id="1" name=""/>
+        <p:cNvGrpSpPr/>
+        <p:nvPr/>
+      </p:nvGrpSpPr>
+      <p:grpSpPr>
+        <a:xfrm>
+          <a:off x="0" y="0"/>
+          <a:ext cx="0" cy="0"/>
+          <a:chOff x="0" y="0"/>
+          <a:chExt cx="0" cy="0"/>
+        </a:xfrm>
+      </p:grpSpPr>
+      <p:sp>
+        <p:nvSpPr>
+          <p:cNvPr id="2" name="Title 1">
+            <a:extLst>
+              <a:ext uri="{FF2B5EF4-FFF2-40B4-BE49-F238E27FC236}">
+                <a16:creationId xmlns:a16="http://schemas.microsoft.com/office/drawing/2014/main" id="{E58F4329-91B1-70FF-290D-ACE7400DA21A}"/>
+              </a:ext>
+            </a:extLst>
+          </p:cNvPr>
+          <p:cNvSpPr>
+            <a:spLocks noGrp="1"/>
+          </p:cNvSpPr>
+          <p:nvPr>
+            <p:ph type="title"/>
+          </p:nvPr>
+        </p:nvSpPr>
+        <p:spPr/>
+        <p:txBody>
+          <a:bodyPr/>
+          <a:lstStyle/>
+          <a:p>
+            <a:r>
+              <a:rPr lang="en-US" dirty="0"/>
+              <a:t>MS5611 CONFIGURATION</a:t>
+            </a:r>
+          </a:p>
+        </p:txBody>
+      </p:sp>
+      <p:sp>
+        <p:nvSpPr>
+          <p:cNvPr id="6" name="Rectangle 5">
+            <a:extLst>
+              <a:ext uri="{FF2B5EF4-FFF2-40B4-BE49-F238E27FC236}">
+                <a16:creationId xmlns:a16="http://schemas.microsoft.com/office/drawing/2014/main" id="{2475AE71-248D-4FE0-D9DF-613F04683DA5}"/>
+              </a:ext>
+            </a:extLst>
+          </p:cNvPr>
+          <p:cNvSpPr/>
+          <p:nvPr/>
+        </p:nvSpPr>
+        <p:spPr>
+          <a:xfrm>
+            <a:off x="1363133" y="1608667"/>
+            <a:ext cx="1871134" cy="956733"/>
+          </a:xfrm>
+          <a:prstGeom prst="rect">
+            <a:avLst/>
+          </a:prstGeom>
+        </p:spPr>
+        <p:style>
+          <a:lnRef idx="2">
+            <a:schemeClr val="accent1">
+              <a:shade val="15000"/>
+            </a:schemeClr>
+          </a:lnRef>
+          <a:fillRef idx="1">
+            <a:schemeClr val="accent1"/>
+          </a:fillRef>
+          <a:effectRef idx="0">
+            <a:schemeClr val="accent1"/>
+          </a:effectRef>
+          <a:fontRef idx="minor">
+            <a:schemeClr val="lt1"/>
+          </a:fontRef>
+        </p:style>
+        <p:txBody>
+          <a:bodyPr rtlCol="0" anchor="ctr"/>
+          <a:lstStyle/>
+          <a:p>
+            <a:pPr algn="ctr"/>
+            <a:r>
+              <a:rPr lang="en-US" dirty="0"/>
+              <a:t>Step 1</a:t>
+            </a:r>
+          </a:p>
+        </p:txBody>
+      </p:sp>
+      <p:sp>
+        <p:nvSpPr>
+          <p:cNvPr id="7" name="Rectangle 6">
+            <a:extLst>
+              <a:ext uri="{FF2B5EF4-FFF2-40B4-BE49-F238E27FC236}">
+                <a16:creationId xmlns:a16="http://schemas.microsoft.com/office/drawing/2014/main" id="{71EC5701-EB58-5F11-000B-D36CA48CB620}"/>
+              </a:ext>
+            </a:extLst>
+          </p:cNvPr>
+          <p:cNvSpPr/>
+          <p:nvPr/>
+        </p:nvSpPr>
+        <p:spPr>
+          <a:xfrm>
+            <a:off x="1363133" y="2950633"/>
+            <a:ext cx="1871134" cy="956733"/>
+          </a:xfrm>
+          <a:prstGeom prst="rect">
+            <a:avLst/>
+          </a:prstGeom>
+        </p:spPr>
+        <p:style>
+          <a:lnRef idx="2">
+            <a:schemeClr val="accent1">
+              <a:shade val="15000"/>
+            </a:schemeClr>
+          </a:lnRef>
+          <a:fillRef idx="1">
+            <a:schemeClr val="accent1"/>
+          </a:fillRef>
+          <a:effectRef idx="0">
+            <a:schemeClr val="accent1"/>
+          </a:effectRef>
+          <a:fontRef idx="minor">
+            <a:schemeClr val="lt1"/>
+          </a:fontRef>
+        </p:style>
+        <p:txBody>
+          <a:bodyPr rtlCol="0" anchor="ctr"/>
+          <a:lstStyle/>
+          <a:p>
+            <a:pPr algn="ctr"/>
+            <a:r>
+              <a:rPr lang="en-US" dirty="0"/>
+              <a:t>Delay or interrupt conversion time</a:t>
+            </a:r>
+          </a:p>
+        </p:txBody>
+      </p:sp>
+      <p:sp>
+        <p:nvSpPr>
+          <p:cNvPr id="8" name="Rectangle 7">
+            <a:extLst>
+              <a:ext uri="{FF2B5EF4-FFF2-40B4-BE49-F238E27FC236}">
+                <a16:creationId xmlns:a16="http://schemas.microsoft.com/office/drawing/2014/main" id="{2C92428F-C326-B40D-D55C-B375623BF1D5}"/>
+              </a:ext>
+            </a:extLst>
+          </p:cNvPr>
+          <p:cNvSpPr/>
+          <p:nvPr/>
+        </p:nvSpPr>
+        <p:spPr>
+          <a:xfrm>
+            <a:off x="1363133" y="4292600"/>
+            <a:ext cx="1871134" cy="956733"/>
+          </a:xfrm>
+          <a:prstGeom prst="rect">
+            <a:avLst/>
+          </a:prstGeom>
+        </p:spPr>
+        <p:style>
+          <a:lnRef idx="2">
+            <a:schemeClr val="accent1">
+              <a:shade val="15000"/>
+            </a:schemeClr>
+          </a:lnRef>
+          <a:fillRef idx="1">
+            <a:schemeClr val="accent1"/>
+          </a:fillRef>
+          <a:effectRef idx="0">
+            <a:schemeClr val="accent1"/>
+          </a:effectRef>
+          <a:fontRef idx="minor">
+            <a:schemeClr val="lt1"/>
+          </a:fontRef>
+        </p:style>
+        <p:txBody>
+          <a:bodyPr rtlCol="0" anchor="ctr"/>
+          <a:lstStyle/>
+          <a:p>
+            <a:pPr algn="ctr"/>
+            <a:r>
+              <a:rPr lang="en-US" dirty="0"/>
+              <a:t>Step 2</a:t>
+            </a:r>
+          </a:p>
+        </p:txBody>
+      </p:sp>
+      <p:sp>
+        <p:nvSpPr>
+          <p:cNvPr id="9" name="Rectangle 8">
+            <a:extLst>
+              <a:ext uri="{FF2B5EF4-FFF2-40B4-BE49-F238E27FC236}">
+                <a16:creationId xmlns:a16="http://schemas.microsoft.com/office/drawing/2014/main" id="{20BD784B-EE21-AD69-A5DD-12B8B2864282}"/>
+              </a:ext>
+            </a:extLst>
+          </p:cNvPr>
+          <p:cNvSpPr/>
+          <p:nvPr/>
+        </p:nvSpPr>
+        <p:spPr>
+          <a:xfrm>
+            <a:off x="1363133" y="5634567"/>
+            <a:ext cx="1871134" cy="956733"/>
+          </a:xfrm>
+          <a:prstGeom prst="rect">
+            <a:avLst/>
+          </a:prstGeom>
+        </p:spPr>
+        <p:style>
+          <a:lnRef idx="2">
+            <a:schemeClr val="accent1">
+              <a:shade val="15000"/>
+            </a:schemeClr>
+          </a:lnRef>
+          <a:fillRef idx="1">
+            <a:schemeClr val="accent1"/>
+          </a:fillRef>
+          <a:effectRef idx="0">
+            <a:schemeClr val="accent1"/>
+          </a:effectRef>
+          <a:fontRef idx="minor">
+            <a:schemeClr val="lt1"/>
+          </a:fontRef>
+        </p:style>
+        <p:txBody>
+          <a:bodyPr rtlCol="0" anchor="ctr"/>
+          <a:lstStyle/>
+          <a:p>
+            <a:pPr algn="ctr"/>
+            <a:r>
+              <a:rPr lang="en-US" dirty="0"/>
+              <a:t>Step 3</a:t>
+            </a:r>
+          </a:p>
+        </p:txBody>
+      </p:sp>
+      <p:cxnSp>
+        <p:nvCxnSpPr>
+          <p:cNvPr id="11" name="Straight Arrow Connector 10">
+            <a:extLst>
+              <a:ext uri="{FF2B5EF4-FFF2-40B4-BE49-F238E27FC236}">
+                <a16:creationId xmlns:a16="http://schemas.microsoft.com/office/drawing/2014/main" id="{18DC2FF2-75DD-075B-53B8-D49632EEEC9F}"/>
+              </a:ext>
+            </a:extLst>
+          </p:cNvPr>
+          <p:cNvCxnSpPr>
+            <a:stCxn id="6" idx="2"/>
+            <a:endCxn id="7" idx="0"/>
+          </p:cNvCxnSpPr>
+          <p:nvPr/>
+        </p:nvCxnSpPr>
+        <p:spPr>
+          <a:xfrm>
+            <a:off x="2298700" y="2565400"/>
+            <a:ext cx="0" cy="385233"/>
+          </a:xfrm>
+          <a:prstGeom prst="straightConnector1">
+            <a:avLst/>
+          </a:prstGeom>
+          <a:ln>
+            <a:tailEnd type="triangle"/>
+          </a:ln>
+        </p:spPr>
+        <p:style>
+          <a:lnRef idx="1">
+            <a:schemeClr val="accent1"/>
+          </a:lnRef>
+          <a:fillRef idx="0">
+            <a:schemeClr val="accent1"/>
+          </a:fillRef>
+          <a:effectRef idx="0">
+            <a:schemeClr val="accent1"/>
+          </a:effectRef>
+          <a:fontRef idx="minor">
+            <a:schemeClr val="tx1"/>
+          </a:fontRef>
+        </p:style>
+      </p:cxnSp>
+      <p:cxnSp>
+        <p:nvCxnSpPr>
+          <p:cNvPr id="13" name="Straight Arrow Connector 12">
+            <a:extLst>
+              <a:ext uri="{FF2B5EF4-FFF2-40B4-BE49-F238E27FC236}">
+                <a16:creationId xmlns:a16="http://schemas.microsoft.com/office/drawing/2014/main" id="{90A25B1C-47EA-E05B-D74B-09B0A0C0313D}"/>
+              </a:ext>
+            </a:extLst>
+          </p:cNvPr>
+          <p:cNvCxnSpPr>
+            <a:stCxn id="7" idx="2"/>
+            <a:endCxn id="8" idx="0"/>
+          </p:cNvCxnSpPr>
+          <p:nvPr/>
+        </p:nvCxnSpPr>
+        <p:spPr>
+          <a:xfrm>
+            <a:off x="2298700" y="3907366"/>
+            <a:ext cx="0" cy="385234"/>
+          </a:xfrm>
+          <a:prstGeom prst="straightConnector1">
+            <a:avLst/>
+          </a:prstGeom>
+          <a:ln>
+            <a:tailEnd type="triangle"/>
+          </a:ln>
+        </p:spPr>
+        <p:style>
+          <a:lnRef idx="1">
+            <a:schemeClr val="accent1"/>
+          </a:lnRef>
+          <a:fillRef idx="0">
+            <a:schemeClr val="accent1"/>
+          </a:fillRef>
+          <a:effectRef idx="0">
+            <a:schemeClr val="accent1"/>
+          </a:effectRef>
+          <a:fontRef idx="minor">
+            <a:schemeClr val="tx1"/>
+          </a:fontRef>
+        </p:style>
+      </p:cxnSp>
+      <p:cxnSp>
+        <p:nvCxnSpPr>
+          <p:cNvPr id="15" name="Straight Arrow Connector 14">
+            <a:extLst>
+              <a:ext uri="{FF2B5EF4-FFF2-40B4-BE49-F238E27FC236}">
+                <a16:creationId xmlns:a16="http://schemas.microsoft.com/office/drawing/2014/main" id="{DD30AB9B-7C16-7381-852C-95611E0F38E4}"/>
+              </a:ext>
+            </a:extLst>
+          </p:cNvPr>
+          <p:cNvCxnSpPr>
+            <a:stCxn id="8" idx="2"/>
+            <a:endCxn id="9" idx="0"/>
+          </p:cNvCxnSpPr>
+          <p:nvPr/>
+        </p:nvCxnSpPr>
+        <p:spPr>
+          <a:xfrm>
+            <a:off x="2298700" y="5249333"/>
+            <a:ext cx="0" cy="385234"/>
+          </a:xfrm>
+          <a:prstGeom prst="straightConnector1">
+            <a:avLst/>
+          </a:prstGeom>
+          <a:ln>
+            <a:tailEnd type="triangle"/>
+          </a:ln>
+        </p:spPr>
+        <p:style>
+          <a:lnRef idx="1">
+            <a:schemeClr val="accent1"/>
+          </a:lnRef>
+          <a:fillRef idx="0">
+            <a:schemeClr val="accent1"/>
+          </a:fillRef>
+          <a:effectRef idx="0">
+            <a:schemeClr val="accent1"/>
+          </a:effectRef>
+          <a:fontRef idx="minor">
+            <a:schemeClr val="tx1"/>
+          </a:fontRef>
+        </p:style>
+      </p:cxnSp>
+      <p:sp>
+        <p:nvSpPr>
+          <p:cNvPr id="17" name="Freeform: Shape 16">
+            <a:extLst>
+              <a:ext uri="{FF2B5EF4-FFF2-40B4-BE49-F238E27FC236}">
+                <a16:creationId xmlns:a16="http://schemas.microsoft.com/office/drawing/2014/main" id="{23D22FB6-194D-3704-3760-D6272A6E4320}"/>
+              </a:ext>
+            </a:extLst>
+          </p:cNvPr>
+          <p:cNvSpPr/>
+          <p:nvPr/>
+        </p:nvSpPr>
+        <p:spPr>
+          <a:xfrm>
+            <a:off x="3242733" y="2057400"/>
+            <a:ext cx="1278492" cy="4097867"/>
+          </a:xfrm>
+          <a:custGeom>
+            <a:avLst/>
+            <a:gdLst>
+              <a:gd name="connsiteX0" fmla="*/ 0 w 1278492"/>
+              <a:gd name="connsiteY0" fmla="*/ 4097867 h 4097867"/>
+              <a:gd name="connsiteX1" fmla="*/ 203200 w 1278492"/>
+              <a:gd name="connsiteY1" fmla="*/ 4080933 h 4097867"/>
+              <a:gd name="connsiteX2" fmla="*/ 262467 w 1278492"/>
+              <a:gd name="connsiteY2" fmla="*/ 4072467 h 4097867"/>
+              <a:gd name="connsiteX3" fmla="*/ 431800 w 1278492"/>
+              <a:gd name="connsiteY3" fmla="*/ 3996267 h 4097867"/>
+              <a:gd name="connsiteX4" fmla="*/ 516467 w 1278492"/>
+              <a:gd name="connsiteY4" fmla="*/ 3962400 h 4097867"/>
+              <a:gd name="connsiteX5" fmla="*/ 601134 w 1278492"/>
+              <a:gd name="connsiteY5" fmla="*/ 3894667 h 4097867"/>
+              <a:gd name="connsiteX6" fmla="*/ 956734 w 1278492"/>
+              <a:gd name="connsiteY6" fmla="*/ 3691467 h 4097867"/>
+              <a:gd name="connsiteX7" fmla="*/ 1058334 w 1278492"/>
+              <a:gd name="connsiteY7" fmla="*/ 3589867 h 4097867"/>
+              <a:gd name="connsiteX8" fmla="*/ 1126067 w 1278492"/>
+              <a:gd name="connsiteY8" fmla="*/ 3429000 h 4097867"/>
+              <a:gd name="connsiteX9" fmla="*/ 1244600 w 1278492"/>
+              <a:gd name="connsiteY9" fmla="*/ 2954867 h 4097867"/>
+              <a:gd name="connsiteX10" fmla="*/ 1278467 w 1278492"/>
+              <a:gd name="connsiteY10" fmla="*/ 2607733 h 4097867"/>
+              <a:gd name="connsiteX11" fmla="*/ 1236134 w 1278492"/>
+              <a:gd name="connsiteY11" fmla="*/ 1871133 h 4097867"/>
+              <a:gd name="connsiteX12" fmla="*/ 956734 w 1278492"/>
+              <a:gd name="connsiteY12" fmla="*/ 855133 h 4097867"/>
+              <a:gd name="connsiteX13" fmla="*/ 821267 w 1278492"/>
+              <a:gd name="connsiteY13" fmla="*/ 482600 h 4097867"/>
+              <a:gd name="connsiteX14" fmla="*/ 677334 w 1278492"/>
+              <a:gd name="connsiteY14" fmla="*/ 169333 h 4097867"/>
+              <a:gd name="connsiteX15" fmla="*/ 635000 w 1278492"/>
+              <a:gd name="connsiteY15" fmla="*/ 127000 h 4097867"/>
+              <a:gd name="connsiteX16" fmla="*/ 558800 w 1278492"/>
+              <a:gd name="connsiteY16" fmla="*/ 42333 h 4097867"/>
+              <a:gd name="connsiteX17" fmla="*/ 524934 w 1278492"/>
+              <a:gd name="connsiteY17" fmla="*/ 33867 h 4097867"/>
+              <a:gd name="connsiteX18" fmla="*/ 465667 w 1278492"/>
+              <a:gd name="connsiteY18" fmla="*/ 16933 h 4097867"/>
+              <a:gd name="connsiteX19" fmla="*/ 364067 w 1278492"/>
+              <a:gd name="connsiteY19" fmla="*/ 8467 h 4097867"/>
+              <a:gd name="connsiteX20" fmla="*/ 279400 w 1278492"/>
+              <a:gd name="connsiteY20" fmla="*/ 0 h 4097867"/>
+              <a:gd name="connsiteX21" fmla="*/ 220134 w 1278492"/>
+              <a:gd name="connsiteY21" fmla="*/ 8467 h 4097867"/>
+              <a:gd name="connsiteX22" fmla="*/ 186267 w 1278492"/>
+              <a:gd name="connsiteY22" fmla="*/ 16933 h 4097867"/>
+              <a:gd name="connsiteX23" fmla="*/ 160867 w 1278492"/>
+              <a:gd name="connsiteY23" fmla="*/ 25400 h 4097867"/>
+              <a:gd name="connsiteX24" fmla="*/ 8467 w 1278492"/>
+              <a:gd name="connsiteY24" fmla="*/ 25400 h 4097867"/>
+            </a:gdLst>
+            <a:ahLst/>
+            <a:cxnLst>
+              <a:cxn ang="0">
+                <a:pos x="connsiteX0" y="connsiteY0"/>
+              </a:cxn>
+              <a:cxn ang="0">
+                <a:pos x="connsiteX1" y="connsiteY1"/>
+              </a:cxn>
+              <a:cxn ang="0">
+                <a:pos x="connsiteX2" y="connsiteY2"/>
+              </a:cxn>
+              <a:cxn ang="0">
+                <a:pos x="connsiteX3" y="connsiteY3"/>
+              </a:cxn>
+              <a:cxn ang="0">
+                <a:pos x="connsiteX4" y="connsiteY4"/>
+              </a:cxn>
+              <a:cxn ang="0">
+                <a:pos x="connsiteX5" y="connsiteY5"/>
+              </a:cxn>
+              <a:cxn ang="0">
+                <a:pos x="connsiteX6" y="connsiteY6"/>
+              </a:cxn>
+              <a:cxn ang="0">
+                <a:pos x="connsiteX7" y="connsiteY7"/>
+              </a:cxn>
+              <a:cxn ang="0">
+                <a:pos x="connsiteX8" y="connsiteY8"/>
+              </a:cxn>
+              <a:cxn ang="0">
+                <a:pos x="connsiteX9" y="connsiteY9"/>
+              </a:cxn>
+              <a:cxn ang="0">
+                <a:pos x="connsiteX10" y="connsiteY10"/>
+              </a:cxn>
+              <a:cxn ang="0">
+                <a:pos x="connsiteX11" y="connsiteY11"/>
+              </a:cxn>
+              <a:cxn ang="0">
+                <a:pos x="connsiteX12" y="connsiteY12"/>
+              </a:cxn>
+              <a:cxn ang="0">
+                <a:pos x="connsiteX13" y="connsiteY13"/>
+              </a:cxn>
+              <a:cxn ang="0">
+                <a:pos x="connsiteX14" y="connsiteY14"/>
+              </a:cxn>
+              <a:cxn ang="0">
+                <a:pos x="connsiteX15" y="connsiteY15"/>
+              </a:cxn>
+              <a:cxn ang="0">
+                <a:pos x="connsiteX16" y="connsiteY16"/>
+              </a:cxn>
+              <a:cxn ang="0">
+                <a:pos x="connsiteX17" y="connsiteY17"/>
+              </a:cxn>
+              <a:cxn ang="0">
+                <a:pos x="connsiteX18" y="connsiteY18"/>
+              </a:cxn>
+              <a:cxn ang="0">
+                <a:pos x="connsiteX19" y="connsiteY19"/>
+              </a:cxn>
+              <a:cxn ang="0">
+                <a:pos x="connsiteX20" y="connsiteY20"/>
+              </a:cxn>
+              <a:cxn ang="0">
+                <a:pos x="connsiteX21" y="connsiteY21"/>
+              </a:cxn>
+              <a:cxn ang="0">
+                <a:pos x="connsiteX22" y="connsiteY22"/>
+              </a:cxn>
+              <a:cxn ang="0">
+                <a:pos x="connsiteX23" y="connsiteY23"/>
+              </a:cxn>
+              <a:cxn ang="0">
+                <a:pos x="connsiteX24" y="connsiteY24"/>
+              </a:cxn>
+            </a:cxnLst>
+            <a:rect l="l" t="t" r="r" b="b"/>
+            <a:pathLst>
+              <a:path w="1278492" h="4097867">
+                <a:moveTo>
+                  <a:pt x="0" y="4097867"/>
+                </a:moveTo>
+                <a:cubicBezTo>
+                  <a:pt x="104255" y="4077016"/>
+                  <a:pt x="-6616" y="4097072"/>
+                  <a:pt x="203200" y="4080933"/>
+                </a:cubicBezTo>
+                <a:cubicBezTo>
+                  <a:pt x="223097" y="4079402"/>
+                  <a:pt x="242711" y="4075289"/>
+                  <a:pt x="262467" y="4072467"/>
+                </a:cubicBezTo>
+                <a:cubicBezTo>
+                  <a:pt x="415031" y="4021612"/>
+                  <a:pt x="258611" y="4078738"/>
+                  <a:pt x="431800" y="3996267"/>
+                </a:cubicBezTo>
+                <a:cubicBezTo>
+                  <a:pt x="459244" y="3983199"/>
+                  <a:pt x="490402" y="3978039"/>
+                  <a:pt x="516467" y="3962400"/>
+                </a:cubicBezTo>
+                <a:cubicBezTo>
+                  <a:pt x="547459" y="3943805"/>
+                  <a:pt x="570225" y="3913399"/>
+                  <a:pt x="601134" y="3894667"/>
+                </a:cubicBezTo>
+                <a:cubicBezTo>
+                  <a:pt x="665303" y="3855777"/>
+                  <a:pt x="895773" y="3752428"/>
+                  <a:pt x="956734" y="3691467"/>
+                </a:cubicBezTo>
+                <a:lnTo>
+                  <a:pt x="1058334" y="3589867"/>
+                </a:lnTo>
+                <a:cubicBezTo>
+                  <a:pt x="1080912" y="3536245"/>
+                  <a:pt x="1108007" y="3484308"/>
+                  <a:pt x="1126067" y="3429000"/>
+                </a:cubicBezTo>
+                <a:cubicBezTo>
+                  <a:pt x="1166063" y="3306511"/>
+                  <a:pt x="1214610" y="3084825"/>
+                  <a:pt x="1244600" y="2954867"/>
+                </a:cubicBezTo>
+                <a:cubicBezTo>
+                  <a:pt x="1255889" y="2839156"/>
+                  <a:pt x="1279375" y="2723990"/>
+                  <a:pt x="1278467" y="2607733"/>
+                </a:cubicBezTo>
+                <a:cubicBezTo>
+                  <a:pt x="1276546" y="2361802"/>
+                  <a:pt x="1267872" y="2115015"/>
+                  <a:pt x="1236134" y="1871133"/>
+                </a:cubicBezTo>
+                <a:cubicBezTo>
+                  <a:pt x="1207363" y="1650050"/>
+                  <a:pt x="1030052" y="1056757"/>
+                  <a:pt x="956734" y="855133"/>
+                </a:cubicBezTo>
+                <a:cubicBezTo>
+                  <a:pt x="911578" y="730955"/>
+                  <a:pt x="871297" y="604895"/>
+                  <a:pt x="821267" y="482600"/>
+                </a:cubicBezTo>
+                <a:cubicBezTo>
+                  <a:pt x="778479" y="378007"/>
+                  <a:pt x="739747" y="265353"/>
+                  <a:pt x="677334" y="169333"/>
+                </a:cubicBezTo>
+                <a:cubicBezTo>
+                  <a:pt x="666458" y="152601"/>
+                  <a:pt x="648350" y="141833"/>
+                  <a:pt x="635000" y="127000"/>
+                </a:cubicBezTo>
+                <a:cubicBezTo>
+                  <a:pt x="611615" y="101017"/>
+                  <a:pt x="588570" y="62180"/>
+                  <a:pt x="558800" y="42333"/>
+                </a:cubicBezTo>
+                <a:cubicBezTo>
+                  <a:pt x="549118" y="35878"/>
+                  <a:pt x="536160" y="36929"/>
+                  <a:pt x="524934" y="33867"/>
+                </a:cubicBezTo>
+                <a:cubicBezTo>
+                  <a:pt x="505112" y="28461"/>
+                  <a:pt x="485962" y="20137"/>
+                  <a:pt x="465667" y="16933"/>
+                </a:cubicBezTo>
+                <a:cubicBezTo>
+                  <a:pt x="432099" y="11633"/>
+                  <a:pt x="397911" y="11544"/>
+                  <a:pt x="364067" y="8467"/>
+                </a:cubicBezTo>
+                <a:lnTo>
+                  <a:pt x="279400" y="0"/>
+                </a:lnTo>
+                <a:cubicBezTo>
+                  <a:pt x="259645" y="2822"/>
+                  <a:pt x="239768" y="4897"/>
+                  <a:pt x="220134" y="8467"/>
+                </a:cubicBezTo>
+                <a:cubicBezTo>
+                  <a:pt x="208685" y="10549"/>
+                  <a:pt x="197456" y="13736"/>
+                  <a:pt x="186267" y="16933"/>
+                </a:cubicBezTo>
+                <a:cubicBezTo>
+                  <a:pt x="177686" y="19385"/>
+                  <a:pt x="169782" y="24975"/>
+                  <a:pt x="160867" y="25400"/>
+                </a:cubicBezTo>
+                <a:cubicBezTo>
+                  <a:pt x="110125" y="27816"/>
+                  <a:pt x="59267" y="25400"/>
+                  <a:pt x="8467" y="25400"/>
+                </a:cubicBezTo>
+              </a:path>
+            </a:pathLst>
+          </a:custGeom>
+          <a:ln w="9525" cap="flat" cmpd="sng" algn="ctr">
+            <a:solidFill>
+              <a:schemeClr val="dk1"/>
+            </a:solidFill>
+            <a:prstDash val="solid"/>
+            <a:round/>
+            <a:headEnd type="none" w="med" len="med"/>
+            <a:tailEnd type="arrow" w="med" len="med"/>
+          </a:ln>
+        </p:spPr>
+        <p:style>
+          <a:lnRef idx="0">
+            <a:scrgbClr r="0" g="0" b="0"/>
+          </a:lnRef>
+          <a:fillRef idx="0">
+            <a:scrgbClr r="0" g="0" b="0"/>
+          </a:fillRef>
+          <a:effectRef idx="0">
+            <a:scrgbClr r="0" g="0" b="0"/>
+          </a:effectRef>
+          <a:fontRef idx="minor">
+            <a:schemeClr val="tx1"/>
+          </a:fontRef>
+        </p:style>
+        <p:txBody>
+          <a:bodyPr rtlCol="0" anchor="ctr"/>
+          <a:lstStyle/>
+          <a:p>
+            <a:pPr algn="ctr"/>
+            <a:endParaRPr lang="en-US"/>
+          </a:p>
+        </p:txBody>
+      </p:sp>
+    </p:spTree>
+    <p:extLst>
+      <p:ext uri="{BB962C8B-B14F-4D97-AF65-F5344CB8AC3E}">
+        <p14:creationId xmlns:p14="http://schemas.microsoft.com/office/powerpoint/2010/main" val="3729858338"/>
+      </p:ext>
+    </p:extLst>
+  </p:cSld>
+  <p:clrMapOvr>
+    <a:masterClrMapping/>
+  </p:clrMapOvr>
+</p:sld>
+</file>
+
+<file path=ppt/slides/slide28.xml><?xml version="1.0" encoding="utf-8"?>
+<p:sld xmlns:a="http://schemas.openxmlformats.org/drawingml/2006/main" xmlns:r="http://schemas.openxmlformats.org/officeDocument/2006/relationships" xmlns:p="http://schemas.openxmlformats.org/presentationml/2006/main">
+  <p:cSld>
+    <p:spTree>
+      <p:nvGrpSpPr>
+        <p:cNvPr id="1" name=""/>
+        <p:cNvGrpSpPr/>
+        <p:nvPr/>
+      </p:nvGrpSpPr>
+      <p:grpSpPr>
+        <a:xfrm>
+          <a:off x="0" y="0"/>
+          <a:ext cx="0" cy="0"/>
+          <a:chOff x="0" y="0"/>
+          <a:chExt cx="0" cy="0"/>
+        </a:xfrm>
+      </p:grpSpPr>
+      <p:sp>
+        <p:nvSpPr>
+          <p:cNvPr id="2" name="Title 1">
+            <a:extLst>
+              <a:ext uri="{FF2B5EF4-FFF2-40B4-BE49-F238E27FC236}">
+                <a16:creationId xmlns:a16="http://schemas.microsoft.com/office/drawing/2014/main" id="{6E391037-84AE-ECAA-3BDA-01037CE49C7D}"/>
+              </a:ext>
+            </a:extLst>
+          </p:cNvPr>
+          <p:cNvSpPr>
+            <a:spLocks noGrp="1"/>
+          </p:cNvSpPr>
+          <p:nvPr>
+            <p:ph type="title"/>
+          </p:nvPr>
+        </p:nvSpPr>
+        <p:spPr/>
+        <p:txBody>
+          <a:bodyPr/>
+          <a:lstStyle/>
+          <a:p>
+            <a:r>
+              <a:rPr lang="en-US" dirty="0"/>
+              <a:t>MS5611 CONFIGURATION</a:t>
+            </a:r>
+          </a:p>
+        </p:txBody>
+      </p:sp>
+      <p:sp>
+        <p:nvSpPr>
+          <p:cNvPr id="3" name="Content Placeholder 2">
+            <a:extLst>
+              <a:ext uri="{FF2B5EF4-FFF2-40B4-BE49-F238E27FC236}">
+                <a16:creationId xmlns:a16="http://schemas.microsoft.com/office/drawing/2014/main" id="{D6496CB2-2778-F3BF-D1DD-4073BDFFAE55}"/>
+              </a:ext>
+            </a:extLst>
+          </p:cNvPr>
+          <p:cNvSpPr>
+            <a:spLocks noGrp="1"/>
+          </p:cNvSpPr>
+          <p:nvPr>
+            <p:ph idx="1"/>
+          </p:nvPr>
+        </p:nvSpPr>
+        <p:spPr/>
+        <p:txBody>
+          <a:bodyPr/>
+          <a:lstStyle/>
+          <a:p>
+            <a:pPr marL="0" indent="0">
+              <a:buNone/>
+            </a:pPr>
+            <a:r>
+              <a:rPr lang="en-US" b="1" dirty="0"/>
+              <a:t>Calculating temperature and pressure </a:t>
+            </a:r>
+          </a:p>
+        </p:txBody>
+      </p:sp>
+      <p:pic>
+        <p:nvPicPr>
+          <p:cNvPr id="5" name="Picture 4">
+            <a:extLst>
+              <a:ext uri="{FF2B5EF4-FFF2-40B4-BE49-F238E27FC236}">
+                <a16:creationId xmlns:a16="http://schemas.microsoft.com/office/drawing/2014/main" id="{0F9F83A0-E975-08E2-A091-577110AF6829}"/>
+              </a:ext>
+            </a:extLst>
+          </p:cNvPr>
+          <p:cNvPicPr>
+            <a:picLocks noChangeAspect="1"/>
+          </p:cNvPicPr>
+          <p:nvPr/>
+        </p:nvPicPr>
+        <p:blipFill>
+          <a:blip r:embed="rId2">
+            <a:extLst>
+              <a:ext uri="{28A0092B-C50C-407E-A947-70E740481C1C}">
+                <a14:useLocalDpi xmlns:a14="http://schemas.microsoft.com/office/drawing/2010/main" val="0"/>
+              </a:ext>
+            </a:extLst>
+          </a:blip>
+          <a:stretch>
+            <a:fillRect/>
+          </a:stretch>
+        </p:blipFill>
+        <p:spPr>
+          <a:xfrm>
+            <a:off x="911151" y="2475112"/>
+            <a:ext cx="9274924" cy="3836788"/>
+          </a:xfrm>
+          <a:prstGeom prst="rect">
+            <a:avLst/>
+          </a:prstGeom>
+        </p:spPr>
+      </p:pic>
+    </p:spTree>
+    <p:extLst>
+      <p:ext uri="{BB962C8B-B14F-4D97-AF65-F5344CB8AC3E}">
+        <p14:creationId xmlns:p14="http://schemas.microsoft.com/office/powerpoint/2010/main" val="732114605"/>
       </p:ext>
     </p:extLst>
   </p:cSld>
